--- a/docs/plots/carbo/jx_carbo_adjcif_death.pptx
+++ b/docs/plots/carbo/jx_carbo_adjcif_death.pptx
@@ -2271,21 +2271,21 @@
           </p:nvSpPr>
           <p:spPr>
             <a:xfrm>
-              <a:off x="972874" y="5068128"/>
-              <a:ext cx="7644336" cy="0"/>
+              <a:off x="1035053" y="5241861"/>
+              <a:ext cx="7582157" cy="0"/>
             </a:xfrm>
             <a:custGeom>
               <a:avLst/>
               <a:pathLst>
-                <a:path w="7644336" h="0">
+                <a:path w="7582157" h="0">
                   <a:moveTo>
                     <a:pt x="0" y="0"/>
                   </a:moveTo>
                   <a:lnTo>
-                    <a:pt x="7644336" y="0"/>
-                  </a:lnTo>
-                  <a:lnTo>
-                    <a:pt x="7644336" y="0"/>
+                    <a:pt x="7582157" y="0"/>
+                  </a:lnTo>
+                  <a:lnTo>
+                    <a:pt x="7582157" y="0"/>
                   </a:lnTo>
                 </a:path>
               </a:pathLst>
@@ -2314,21 +2314,21 @@
           </p:nvSpPr>
           <p:spPr>
             <a:xfrm>
-              <a:off x="972874" y="4043539"/>
-              <a:ext cx="7644336" cy="0"/>
+              <a:off x="1035053" y="4564738"/>
+              <a:ext cx="7582157" cy="0"/>
             </a:xfrm>
             <a:custGeom>
               <a:avLst/>
               <a:pathLst>
-                <a:path w="7644336" h="0">
+                <a:path w="7582157" h="0">
                   <a:moveTo>
                     <a:pt x="0" y="0"/>
                   </a:moveTo>
                   <a:lnTo>
-                    <a:pt x="7644336" y="0"/>
-                  </a:lnTo>
-                  <a:lnTo>
-                    <a:pt x="7644336" y="0"/>
+                    <a:pt x="7582157" y="0"/>
+                  </a:lnTo>
+                  <a:lnTo>
+                    <a:pt x="7582157" y="0"/>
                   </a:lnTo>
                 </a:path>
               </a:pathLst>
@@ -2357,21 +2357,21 @@
           </p:nvSpPr>
           <p:spPr>
             <a:xfrm>
-              <a:off x="972874" y="3018951"/>
-              <a:ext cx="7644336" cy="0"/>
+              <a:off x="1035053" y="3887616"/>
+              <a:ext cx="7582157" cy="0"/>
             </a:xfrm>
             <a:custGeom>
               <a:avLst/>
               <a:pathLst>
-                <a:path w="7644336" h="0">
+                <a:path w="7582157" h="0">
                   <a:moveTo>
                     <a:pt x="0" y="0"/>
                   </a:moveTo>
                   <a:lnTo>
-                    <a:pt x="7644336" y="0"/>
-                  </a:lnTo>
-                  <a:lnTo>
-                    <a:pt x="7644336" y="0"/>
+                    <a:pt x="7582157" y="0"/>
+                  </a:lnTo>
+                  <a:lnTo>
+                    <a:pt x="7582157" y="0"/>
                   </a:lnTo>
                 </a:path>
               </a:pathLst>
@@ -2400,21 +2400,21 @@
           </p:nvSpPr>
           <p:spPr>
             <a:xfrm>
-              <a:off x="2079186" y="2583293"/>
-              <a:ext cx="0" cy="3139848"/>
+              <a:off x="1035053" y="3210494"/>
+              <a:ext cx="7582157" cy="0"/>
             </a:xfrm>
             <a:custGeom>
               <a:avLst/>
               <a:pathLst>
-                <a:path w="0" h="3139848">
+                <a:path w="7582157" h="0">
                   <a:moveTo>
-                    <a:pt x="0" y="3139848"/>
+                    <a:pt x="0" y="0"/>
                   </a:moveTo>
                   <a:lnTo>
-                    <a:pt x="0" y="0"/>
-                  </a:lnTo>
-                  <a:lnTo>
-                    <a:pt x="0" y="0"/>
+                    <a:pt x="7582157" y="0"/>
+                  </a:lnTo>
+                  <a:lnTo>
+                    <a:pt x="7582157" y="0"/>
                   </a:lnTo>
                 </a:path>
               </a:pathLst>
@@ -2443,7 +2443,7 @@
           </p:nvSpPr>
           <p:spPr>
             <a:xfrm>
-              <a:off x="4076139" y="2583293"/>
+              <a:off x="2132366" y="2583293"/>
               <a:ext cx="0" cy="3139848"/>
             </a:xfrm>
             <a:custGeom>
@@ -2486,7 +2486,7 @@
           </p:nvSpPr>
           <p:spPr>
             <a:xfrm>
-              <a:off x="6073092" y="2583293"/>
+              <a:off x="4113076" y="2583293"/>
               <a:ext cx="0" cy="3139848"/>
             </a:xfrm>
             <a:custGeom>
@@ -2529,7 +2529,7 @@
           </p:nvSpPr>
           <p:spPr>
             <a:xfrm>
-              <a:off x="8070045" y="2583293"/>
+              <a:off x="6093786" y="2583293"/>
               <a:ext cx="0" cy="3139848"/>
             </a:xfrm>
             <a:custGeom>
@@ -2572,26 +2572,26 @@
           </p:nvSpPr>
           <p:spPr>
             <a:xfrm>
-              <a:off x="972874" y="5580422"/>
-              <a:ext cx="7644336" cy="0"/>
+              <a:off x="8074496" y="2583293"/>
+              <a:ext cx="0" cy="3139848"/>
             </a:xfrm>
             <a:custGeom>
               <a:avLst/>
               <a:pathLst>
-                <a:path w="7644336" h="0">
+                <a:path w="0" h="3139848">
                   <a:moveTo>
+                    <a:pt x="0" y="3139848"/>
+                  </a:moveTo>
+                  <a:lnTo>
                     <a:pt x="0" y="0"/>
-                  </a:moveTo>
-                  <a:lnTo>
-                    <a:pt x="7644336" y="0"/>
-                  </a:lnTo>
-                  <a:lnTo>
-                    <a:pt x="7644336" y="0"/>
+                  </a:lnTo>
+                  <a:lnTo>
+                    <a:pt x="0" y="0"/>
                   </a:lnTo>
                 </a:path>
               </a:pathLst>
             </a:custGeom>
-            <a:ln w="13550" cap="flat">
+            <a:ln w="6775" cap="flat">
               <a:solidFill>
                 <a:srgbClr val="EBEBEB">
                   <a:alpha val="100000"/>
@@ -2615,21 +2615,21 @@
           </p:nvSpPr>
           <p:spPr>
             <a:xfrm>
-              <a:off x="972874" y="4555834"/>
-              <a:ext cx="7644336" cy="0"/>
+              <a:off x="1035053" y="5580422"/>
+              <a:ext cx="7582157" cy="0"/>
             </a:xfrm>
             <a:custGeom>
               <a:avLst/>
               <a:pathLst>
-                <a:path w="7644336" h="0">
+                <a:path w="7582157" h="0">
                   <a:moveTo>
                     <a:pt x="0" y="0"/>
                   </a:moveTo>
                   <a:lnTo>
-                    <a:pt x="7644336" y="0"/>
-                  </a:lnTo>
-                  <a:lnTo>
-                    <a:pt x="7644336" y="0"/>
+                    <a:pt x="7582157" y="0"/>
+                  </a:lnTo>
+                  <a:lnTo>
+                    <a:pt x="7582157" y="0"/>
                   </a:lnTo>
                 </a:path>
               </a:pathLst>
@@ -2658,21 +2658,21 @@
           </p:nvSpPr>
           <p:spPr>
             <a:xfrm>
-              <a:off x="972874" y="3531245"/>
-              <a:ext cx="7644336" cy="0"/>
+              <a:off x="1035053" y="4903299"/>
+              <a:ext cx="7582157" cy="0"/>
             </a:xfrm>
             <a:custGeom>
               <a:avLst/>
               <a:pathLst>
-                <a:path w="7644336" h="0">
+                <a:path w="7582157" h="0">
                   <a:moveTo>
                     <a:pt x="0" y="0"/>
                   </a:moveTo>
                   <a:lnTo>
-                    <a:pt x="7644336" y="0"/>
-                  </a:lnTo>
-                  <a:lnTo>
-                    <a:pt x="7644336" y="0"/>
+                    <a:pt x="7582157" y="0"/>
+                  </a:lnTo>
+                  <a:lnTo>
+                    <a:pt x="7582157" y="0"/>
                   </a:lnTo>
                 </a:path>
               </a:pathLst>
@@ -2701,21 +2701,21 @@
           </p:nvSpPr>
           <p:spPr>
             <a:xfrm>
-              <a:off x="1080709" y="2583293"/>
-              <a:ext cx="0" cy="3139848"/>
+              <a:off x="1035053" y="4226177"/>
+              <a:ext cx="7582157" cy="0"/>
             </a:xfrm>
             <a:custGeom>
               <a:avLst/>
               <a:pathLst>
-                <a:path w="0" h="3139848">
+                <a:path w="7582157" h="0">
                   <a:moveTo>
-                    <a:pt x="0" y="3139848"/>
+                    <a:pt x="0" y="0"/>
                   </a:moveTo>
                   <a:lnTo>
-                    <a:pt x="0" y="0"/>
-                  </a:lnTo>
-                  <a:lnTo>
-                    <a:pt x="0" y="0"/>
+                    <a:pt x="7582157" y="0"/>
+                  </a:lnTo>
+                  <a:lnTo>
+                    <a:pt x="7582157" y="0"/>
                   </a:lnTo>
                 </a:path>
               </a:pathLst>
@@ -2744,21 +2744,21 @@
           </p:nvSpPr>
           <p:spPr>
             <a:xfrm>
-              <a:off x="3077663" y="2583293"/>
-              <a:ext cx="0" cy="3139848"/>
+              <a:off x="1035053" y="3549055"/>
+              <a:ext cx="7582157" cy="0"/>
             </a:xfrm>
             <a:custGeom>
               <a:avLst/>
               <a:pathLst>
-                <a:path w="0" h="3139848">
+                <a:path w="7582157" h="0">
                   <a:moveTo>
-                    <a:pt x="0" y="3139848"/>
+                    <a:pt x="0" y="0"/>
                   </a:moveTo>
                   <a:lnTo>
-                    <a:pt x="0" y="0"/>
-                  </a:lnTo>
-                  <a:lnTo>
-                    <a:pt x="0" y="0"/>
+                    <a:pt x="7582157" y="0"/>
+                  </a:lnTo>
+                  <a:lnTo>
+                    <a:pt x="7582157" y="0"/>
                   </a:lnTo>
                 </a:path>
               </a:pathLst>
@@ -2787,21 +2787,21 @@
           </p:nvSpPr>
           <p:spPr>
             <a:xfrm>
-              <a:off x="5074616" y="2583293"/>
-              <a:ext cx="0" cy="3139848"/>
+              <a:off x="1035053" y="2871932"/>
+              <a:ext cx="7582157" cy="0"/>
             </a:xfrm>
             <a:custGeom>
               <a:avLst/>
               <a:pathLst>
-                <a:path w="0" h="3139848">
+                <a:path w="7582157" h="0">
                   <a:moveTo>
-                    <a:pt x="0" y="3139848"/>
+                    <a:pt x="0" y="0"/>
                   </a:moveTo>
                   <a:lnTo>
-                    <a:pt x="0" y="0"/>
-                  </a:lnTo>
-                  <a:lnTo>
-                    <a:pt x="0" y="0"/>
+                    <a:pt x="7582157" y="0"/>
+                  </a:lnTo>
+                  <a:lnTo>
+                    <a:pt x="7582157" y="0"/>
                   </a:lnTo>
                 </a:path>
               </a:pathLst>
@@ -2830,7 +2830,7 @@
           </p:nvSpPr>
           <p:spPr>
             <a:xfrm>
-              <a:off x="7071569" y="2583293"/>
+              <a:off x="1142011" y="2583293"/>
               <a:ext cx="0" cy="3139848"/>
             </a:xfrm>
             <a:custGeom>
@@ -2873,87 +2873,216 @@
           </p:nvSpPr>
           <p:spPr>
             <a:xfrm>
-              <a:off x="1320344" y="4476389"/>
-              <a:ext cx="6949396" cy="998254"/>
+              <a:off x="3122721" y="2583293"/>
+              <a:ext cx="0" cy="3139848"/>
             </a:xfrm>
             <a:custGeom>
               <a:avLst/>
               <a:pathLst>
-                <a:path w="6949396" h="998254">
+                <a:path w="0" h="3139848">
                   <a:moveTo>
-                    <a:pt x="0" y="998254"/>
+                    <a:pt x="0" y="3139848"/>
                   </a:moveTo>
                   <a:lnTo>
-                    <a:pt x="718903" y="998254"/>
-                  </a:lnTo>
-                  <a:lnTo>
-                    <a:pt x="718903" y="998254"/>
-                  </a:lnTo>
-                  <a:lnTo>
-                    <a:pt x="958537" y="998254"/>
-                  </a:lnTo>
-                  <a:lnTo>
-                    <a:pt x="958537" y="891828"/>
-                  </a:lnTo>
-                  <a:lnTo>
-                    <a:pt x="1517684" y="891828"/>
-                  </a:lnTo>
-                  <a:lnTo>
-                    <a:pt x="1517684" y="783422"/>
-                  </a:lnTo>
-                  <a:lnTo>
-                    <a:pt x="1757318" y="783422"/>
-                  </a:lnTo>
-                  <a:lnTo>
-                    <a:pt x="1757318" y="673656"/>
-                  </a:lnTo>
-                  <a:lnTo>
-                    <a:pt x="1996953" y="673656"/>
-                  </a:lnTo>
-                  <a:lnTo>
-                    <a:pt x="1996953" y="563949"/>
-                  </a:lnTo>
-                  <a:lnTo>
-                    <a:pt x="2076831" y="563949"/>
-                  </a:lnTo>
-                  <a:lnTo>
-                    <a:pt x="2076831" y="453818"/>
-                  </a:lnTo>
-                  <a:lnTo>
-                    <a:pt x="2156709" y="453818"/>
-                  </a:lnTo>
-                  <a:lnTo>
-                    <a:pt x="2156709" y="340900"/>
-                  </a:lnTo>
-                  <a:lnTo>
-                    <a:pt x="4153662" y="340900"/>
-                  </a:lnTo>
-                  <a:lnTo>
-                    <a:pt x="4153662" y="227701"/>
-                  </a:lnTo>
-                  <a:lnTo>
-                    <a:pt x="5990859" y="227701"/>
-                  </a:lnTo>
-                  <a:lnTo>
-                    <a:pt x="5990859" y="114659"/>
-                  </a:lnTo>
-                  <a:lnTo>
-                    <a:pt x="6230493" y="114659"/>
-                  </a:lnTo>
-                  <a:lnTo>
-                    <a:pt x="6230493" y="0"/>
-                  </a:lnTo>
-                  <a:lnTo>
-                    <a:pt x="6390249" y="0"/>
-                  </a:lnTo>
-                  <a:lnTo>
-                    <a:pt x="6390249" y="0"/>
-                  </a:lnTo>
-                  <a:lnTo>
-                    <a:pt x="6949396" y="0"/>
-                  </a:lnTo>
-                  <a:lnTo>
-                    <a:pt x="6949396" y="0"/>
+                    <a:pt x="0" y="0"/>
+                  </a:lnTo>
+                  <a:lnTo>
+                    <a:pt x="0" y="0"/>
+                  </a:lnTo>
+                </a:path>
+              </a:pathLst>
+            </a:custGeom>
+            <a:ln w="13550" cap="flat">
+              <a:solidFill>
+                <a:srgbClr val="EBEBEB">
+                  <a:alpha val="100000"/>
+                </a:srgbClr>
+              </a:solidFill>
+              <a:prstDash val="solid"/>
+              <a:round/>
+            </a:ln>
+          </p:spPr>
+          <p:txBody>
+            <a:bodyPr/>
+            <a:lstStyle/>
+            <a:p/>
+          </p:txBody>
+        </p:sp>
+        <p:sp>
+          <p:nvSpPr>
+            <p:cNvPr id="19" name="pl19"/>
+            <p:cNvSpPr/>
+            <p:nvPr/>
+          </p:nvSpPr>
+          <p:spPr>
+            <a:xfrm>
+              <a:off x="5103431" y="2583293"/>
+              <a:ext cx="0" cy="3139848"/>
+            </a:xfrm>
+            <a:custGeom>
+              <a:avLst/>
+              <a:pathLst>
+                <a:path w="0" h="3139848">
+                  <a:moveTo>
+                    <a:pt x="0" y="3139848"/>
+                  </a:moveTo>
+                  <a:lnTo>
+                    <a:pt x="0" y="0"/>
+                  </a:lnTo>
+                  <a:lnTo>
+                    <a:pt x="0" y="0"/>
+                  </a:lnTo>
+                </a:path>
+              </a:pathLst>
+            </a:custGeom>
+            <a:ln w="13550" cap="flat">
+              <a:solidFill>
+                <a:srgbClr val="EBEBEB">
+                  <a:alpha val="100000"/>
+                </a:srgbClr>
+              </a:solidFill>
+              <a:prstDash val="solid"/>
+              <a:round/>
+            </a:ln>
+          </p:spPr>
+          <p:txBody>
+            <a:bodyPr/>
+            <a:lstStyle/>
+            <a:p/>
+          </p:txBody>
+        </p:sp>
+        <p:sp>
+          <p:nvSpPr>
+            <p:cNvPr id="20" name="pl20"/>
+            <p:cNvSpPr/>
+            <p:nvPr/>
+          </p:nvSpPr>
+          <p:spPr>
+            <a:xfrm>
+              <a:off x="7084141" y="2583293"/>
+              <a:ext cx="0" cy="3139848"/>
+            </a:xfrm>
+            <a:custGeom>
+              <a:avLst/>
+              <a:pathLst>
+                <a:path w="0" h="3139848">
+                  <a:moveTo>
+                    <a:pt x="0" y="3139848"/>
+                  </a:moveTo>
+                  <a:lnTo>
+                    <a:pt x="0" y="0"/>
+                  </a:lnTo>
+                  <a:lnTo>
+                    <a:pt x="0" y="0"/>
+                  </a:lnTo>
+                </a:path>
+              </a:pathLst>
+            </a:custGeom>
+            <a:ln w="13550" cap="flat">
+              <a:solidFill>
+                <a:srgbClr val="EBEBEB">
+                  <a:alpha val="100000"/>
+                </a:srgbClr>
+              </a:solidFill>
+              <a:prstDash val="solid"/>
+              <a:round/>
+            </a:ln>
+          </p:spPr>
+          <p:txBody>
+            <a:bodyPr/>
+            <a:lstStyle/>
+            <a:p/>
+          </p:txBody>
+        </p:sp>
+        <p:sp>
+          <p:nvSpPr>
+            <p:cNvPr id="21" name="pl21"/>
+            <p:cNvSpPr/>
+            <p:nvPr/>
+          </p:nvSpPr>
+          <p:spPr>
+            <a:xfrm>
+              <a:off x="1379697" y="3930708"/>
+              <a:ext cx="6892870" cy="1489037"/>
+            </a:xfrm>
+            <a:custGeom>
+              <a:avLst/>
+              <a:pathLst>
+                <a:path w="6892870" h="1489037">
+                  <a:moveTo>
+                    <a:pt x="0" y="1489037"/>
+                  </a:moveTo>
+                  <a:lnTo>
+                    <a:pt x="713055" y="1489037"/>
+                  </a:lnTo>
+                  <a:lnTo>
+                    <a:pt x="713055" y="1489037"/>
+                  </a:lnTo>
+                  <a:lnTo>
+                    <a:pt x="950740" y="1489037"/>
+                  </a:lnTo>
+                  <a:lnTo>
+                    <a:pt x="950740" y="1330477"/>
+                  </a:lnTo>
+                  <a:lnTo>
+                    <a:pt x="1505339" y="1330477"/>
+                  </a:lnTo>
+                  <a:lnTo>
+                    <a:pt x="1505339" y="1168667"/>
+                  </a:lnTo>
+                  <a:lnTo>
+                    <a:pt x="1743024" y="1168667"/>
+                  </a:lnTo>
+                  <a:lnTo>
+                    <a:pt x="1743024" y="1003373"/>
+                  </a:lnTo>
+                  <a:lnTo>
+                    <a:pt x="1980709" y="1003373"/>
+                  </a:lnTo>
+                  <a:lnTo>
+                    <a:pt x="1980709" y="840307"/>
+                  </a:lnTo>
+                  <a:lnTo>
+                    <a:pt x="2059938" y="840307"/>
+                  </a:lnTo>
+                  <a:lnTo>
+                    <a:pt x="2059938" y="679581"/>
+                  </a:lnTo>
+                  <a:lnTo>
+                    <a:pt x="2139166" y="679581"/>
+                  </a:lnTo>
+                  <a:lnTo>
+                    <a:pt x="2139166" y="515254"/>
+                  </a:lnTo>
+                  <a:lnTo>
+                    <a:pt x="4119876" y="515254"/>
+                  </a:lnTo>
+                  <a:lnTo>
+                    <a:pt x="4119876" y="342908"/>
+                  </a:lnTo>
+                  <a:lnTo>
+                    <a:pt x="5942129" y="342908"/>
+                  </a:lnTo>
+                  <a:lnTo>
+                    <a:pt x="5942129" y="173672"/>
+                  </a:lnTo>
+                  <a:lnTo>
+                    <a:pt x="6179814" y="173672"/>
+                  </a:lnTo>
+                  <a:lnTo>
+                    <a:pt x="6179814" y="0"/>
+                  </a:lnTo>
+                  <a:lnTo>
+                    <a:pt x="6338271" y="0"/>
+                  </a:lnTo>
+                  <a:lnTo>
+                    <a:pt x="6338271" y="0"/>
+                  </a:lnTo>
+                  <a:lnTo>
+                    <a:pt x="6892870" y="0"/>
+                  </a:lnTo>
+                  <a:lnTo>
+                    <a:pt x="6892870" y="0"/>
                   </a:lnTo>
                 </a:path>
               </a:pathLst>
@@ -2976,93 +3105,93 @@
         </p:sp>
         <p:sp>
           <p:nvSpPr>
-            <p:cNvPr id="19" name="pl19"/>
+            <p:cNvPr id="22" name="pl22"/>
             <p:cNvSpPr/>
             <p:nvPr/>
           </p:nvSpPr>
           <p:spPr>
             <a:xfrm>
-              <a:off x="1320344" y="2861938"/>
-              <a:ext cx="6949396" cy="2445191"/>
+              <a:off x="1379697" y="2861938"/>
+              <a:ext cx="6892870" cy="2437033"/>
             </a:xfrm>
             <a:custGeom>
               <a:avLst/>
               <a:pathLst>
-                <a:path w="6949396" h="2445191">
+                <a:path w="6892870" h="2437033">
                   <a:moveTo>
-                    <a:pt x="0" y="2445191"/>
+                    <a:pt x="0" y="2437033"/>
                   </a:moveTo>
                   <a:lnTo>
-                    <a:pt x="718903" y="2445191"/>
-                  </a:lnTo>
-                  <a:lnTo>
-                    <a:pt x="718903" y="2445191"/>
-                  </a:lnTo>
-                  <a:lnTo>
-                    <a:pt x="958537" y="2445191"/>
-                  </a:lnTo>
-                  <a:lnTo>
-                    <a:pt x="958537" y="2173026"/>
-                  </a:lnTo>
-                  <a:lnTo>
-                    <a:pt x="1517684" y="2173026"/>
-                  </a:lnTo>
-                  <a:lnTo>
-                    <a:pt x="1517684" y="1898671"/>
-                  </a:lnTo>
-                  <a:lnTo>
-                    <a:pt x="1757318" y="1898671"/>
-                  </a:lnTo>
-                  <a:lnTo>
-                    <a:pt x="1757318" y="1623800"/>
-                  </a:lnTo>
-                  <a:lnTo>
-                    <a:pt x="1996953" y="1623800"/>
-                  </a:lnTo>
-                  <a:lnTo>
-                    <a:pt x="1996953" y="1351998"/>
-                  </a:lnTo>
-                  <a:lnTo>
-                    <a:pt x="2076831" y="1351998"/>
-                  </a:lnTo>
-                  <a:lnTo>
-                    <a:pt x="2076831" y="1082059"/>
-                  </a:lnTo>
-                  <a:lnTo>
-                    <a:pt x="2156709" y="1082059"/>
-                  </a:lnTo>
-                  <a:lnTo>
-                    <a:pt x="2156709" y="808294"/>
-                  </a:lnTo>
-                  <a:lnTo>
-                    <a:pt x="4153662" y="808294"/>
-                  </a:lnTo>
-                  <a:lnTo>
-                    <a:pt x="4153662" y="536874"/>
-                  </a:lnTo>
-                  <a:lnTo>
-                    <a:pt x="5990859" y="536874"/>
-                  </a:lnTo>
-                  <a:lnTo>
-                    <a:pt x="5990859" y="268837"/>
-                  </a:lnTo>
-                  <a:lnTo>
-                    <a:pt x="6230493" y="268837"/>
-                  </a:lnTo>
-                  <a:lnTo>
-                    <a:pt x="6230493" y="0"/>
-                  </a:lnTo>
-                  <a:lnTo>
-                    <a:pt x="6390249" y="0"/>
-                  </a:lnTo>
-                  <a:lnTo>
-                    <a:pt x="6390249" y="0"/>
-                  </a:lnTo>
-                  <a:lnTo>
-                    <a:pt x="6949396" y="0"/>
-                  </a:lnTo>
-                  <a:lnTo>
-                    <a:pt x="6949396" y="0"/>
+                    <a:pt x="713055" y="2437033"/>
+                  </a:lnTo>
+                  <a:lnTo>
+                    <a:pt x="713055" y="2437033"/>
+                  </a:lnTo>
+                  <a:lnTo>
+                    <a:pt x="950740" y="2437033"/>
+                  </a:lnTo>
+                  <a:lnTo>
+                    <a:pt x="950740" y="2163758"/>
+                  </a:lnTo>
+                  <a:lnTo>
+                    <a:pt x="1505339" y="2163758"/>
+                  </a:lnTo>
+                  <a:lnTo>
+                    <a:pt x="1505339" y="1889038"/>
+                  </a:lnTo>
+                  <a:lnTo>
+                    <a:pt x="1743024" y="1889038"/>
+                  </a:lnTo>
+                  <a:lnTo>
+                    <a:pt x="1743024" y="1612345"/>
+                  </a:lnTo>
+                  <a:lnTo>
+                    <a:pt x="1980709" y="1612345"/>
+                  </a:lnTo>
+                  <a:lnTo>
+                    <a:pt x="1980709" y="1342930"/>
+                  </a:lnTo>
+                  <a:lnTo>
+                    <a:pt x="2059938" y="1342930"/>
+                  </a:lnTo>
+                  <a:lnTo>
+                    <a:pt x="2059938" y="1080526"/>
+                  </a:lnTo>
+                  <a:lnTo>
+                    <a:pt x="2139166" y="1080526"/>
+                  </a:lnTo>
+                  <a:lnTo>
+                    <a:pt x="2139166" y="815192"/>
+                  </a:lnTo>
+                  <a:lnTo>
+                    <a:pt x="4119876" y="815192"/>
+                  </a:lnTo>
+                  <a:lnTo>
+                    <a:pt x="4119876" y="539843"/>
+                  </a:lnTo>
+                  <a:lnTo>
+                    <a:pt x="5942129" y="539843"/>
+                  </a:lnTo>
+                  <a:lnTo>
+                    <a:pt x="5942129" y="272151"/>
+                  </a:lnTo>
+                  <a:lnTo>
+                    <a:pt x="6179814" y="272151"/>
+                  </a:lnTo>
+                  <a:lnTo>
+                    <a:pt x="6179814" y="0"/>
+                  </a:lnTo>
+                  <a:lnTo>
+                    <a:pt x="6338271" y="0"/>
+                  </a:lnTo>
+                  <a:lnTo>
+                    <a:pt x="6338271" y="0"/>
+                  </a:lnTo>
+                  <a:lnTo>
+                    <a:pt x="6892870" y="0"/>
+                  </a:lnTo>
+                  <a:lnTo>
+                    <a:pt x="6892870" y="0"/>
                   </a:lnTo>
                 </a:path>
               </a:pathLst>
@@ -3085,14 +3214,14 @@
         </p:sp>
         <p:sp>
           <p:nvSpPr>
-            <p:cNvPr id="20" name="tx20"/>
+            <p:cNvPr id="23" name="tx23"/>
             <p:cNvSpPr/>
             <p:nvPr/>
           </p:nvSpPr>
           <p:spPr>
             <a:xfrm>
               <a:off x="692708" y="5540371"/>
-              <a:ext cx="217535" cy="80101"/>
+              <a:ext cx="279714" cy="80101"/>
             </a:xfrm>
             <a:prstGeom prst="rect">
               <a:avLst/>
@@ -3124,21 +3253,21 @@
                   <a:latin typeface="Helvetica"/>
                   <a:cs typeface="Helvetica"/>
                 </a:rPr>
-                <a:t>0.00</a:t>
+                <a:t>0.000</a:t>
               </a:r>
             </a:p>
           </p:txBody>
         </p:sp>
         <p:sp>
           <p:nvSpPr>
-            <p:cNvPr id="21" name="tx21"/>
+            <p:cNvPr id="24" name="tx24"/>
             <p:cNvSpPr/>
             <p:nvPr/>
           </p:nvSpPr>
           <p:spPr>
             <a:xfrm>
-              <a:off x="692708" y="4515783"/>
-              <a:ext cx="217535" cy="80101"/>
+              <a:off x="692708" y="4863249"/>
+              <a:ext cx="279714" cy="80101"/>
             </a:xfrm>
             <a:prstGeom prst="rect">
               <a:avLst/>
@@ -3170,21 +3299,21 @@
                   <a:latin typeface="Helvetica"/>
                   <a:cs typeface="Helvetica"/>
                 </a:rPr>
-                <a:t>0.05</a:t>
+                <a:t>0.025</a:t>
               </a:r>
             </a:p>
           </p:txBody>
         </p:sp>
         <p:sp>
           <p:nvSpPr>
-            <p:cNvPr id="22" name="tx22"/>
+            <p:cNvPr id="25" name="tx25"/>
             <p:cNvSpPr/>
             <p:nvPr/>
           </p:nvSpPr>
           <p:spPr>
             <a:xfrm>
-              <a:off x="692708" y="3491195"/>
-              <a:ext cx="217535" cy="80101"/>
+              <a:off x="692708" y="4186126"/>
+              <a:ext cx="279714" cy="80101"/>
             </a:xfrm>
             <a:prstGeom prst="rect">
               <a:avLst/>
@@ -3216,20 +3345,112 @@
                   <a:latin typeface="Helvetica"/>
                   <a:cs typeface="Helvetica"/>
                 </a:rPr>
-                <a:t>0.10</a:t>
+                <a:t>0.050</a:t>
               </a:r>
             </a:p>
           </p:txBody>
         </p:sp>
         <p:sp>
           <p:nvSpPr>
-            <p:cNvPr id="23" name="tx23"/>
+            <p:cNvPr id="26" name="tx26"/>
             <p:cNvSpPr/>
             <p:nvPr/>
           </p:nvSpPr>
           <p:spPr>
             <a:xfrm>
-              <a:off x="1049620" y="5785772"/>
+              <a:off x="692708" y="3509004"/>
+              <a:ext cx="279714" cy="80101"/>
+            </a:xfrm>
+            <a:prstGeom prst="rect">
+              <a:avLst/>
+            </a:prstGeom>
+            <a:noFill/>
+          </p:spPr>
+          <p:txBody>
+            <a:bodyPr lIns="0" rIns="0" tIns="0" bIns="0" anchorCtr="1" anchor="ctr" wrap="none"/>
+            <a:lstStyle/>
+            <a:p>
+              <a:pPr algn="l" marL="0" marR="0" indent="0">
+                <a:lnSpc>
+                  <a:spcPts val="880"/>
+                </a:lnSpc>
+                <a:spcBef>
+                  <a:spcPts val="0"/>
+                </a:spcBef>
+                <a:spcAft>
+                  <a:spcPts val="0"/>
+                </a:spcAft>
+              </a:pPr>
+              <a:r>
+                <a:rPr sz="880">
+                  <a:solidFill>
+                    <a:srgbClr val="4D4D4D">
+                      <a:alpha val="100000"/>
+                    </a:srgbClr>
+                  </a:solidFill>
+                  <a:latin typeface="Helvetica"/>
+                  <a:cs typeface="Helvetica"/>
+                </a:rPr>
+                <a:t>0.075</a:t>
+              </a:r>
+            </a:p>
+          </p:txBody>
+        </p:sp>
+        <p:sp>
+          <p:nvSpPr>
+            <p:cNvPr id="27" name="tx27"/>
+            <p:cNvSpPr/>
+            <p:nvPr/>
+          </p:nvSpPr>
+          <p:spPr>
+            <a:xfrm>
+              <a:off x="692708" y="2831882"/>
+              <a:ext cx="279714" cy="80101"/>
+            </a:xfrm>
+            <a:prstGeom prst="rect">
+              <a:avLst/>
+            </a:prstGeom>
+            <a:noFill/>
+          </p:spPr>
+          <p:txBody>
+            <a:bodyPr lIns="0" rIns="0" tIns="0" bIns="0" anchorCtr="1" anchor="ctr" wrap="none"/>
+            <a:lstStyle/>
+            <a:p>
+              <a:pPr algn="l" marL="0" marR="0" indent="0">
+                <a:lnSpc>
+                  <a:spcPts val="880"/>
+                </a:lnSpc>
+                <a:spcBef>
+                  <a:spcPts val="0"/>
+                </a:spcBef>
+                <a:spcAft>
+                  <a:spcPts val="0"/>
+                </a:spcAft>
+              </a:pPr>
+              <a:r>
+                <a:rPr sz="880">
+                  <a:solidFill>
+                    <a:srgbClr val="4D4D4D">
+                      <a:alpha val="100000"/>
+                    </a:srgbClr>
+                  </a:solidFill>
+                  <a:latin typeface="Helvetica"/>
+                  <a:cs typeface="Helvetica"/>
+                </a:rPr>
+                <a:t>0.100</a:t>
+              </a:r>
+            </a:p>
+          </p:txBody>
+        </p:sp>
+        <p:sp>
+          <p:nvSpPr>
+            <p:cNvPr id="28" name="tx28"/>
+            <p:cNvSpPr/>
+            <p:nvPr/>
+          </p:nvSpPr>
+          <p:spPr>
+            <a:xfrm>
+              <a:off x="1110922" y="5785772"/>
               <a:ext cx="62179" cy="80101"/>
             </a:xfrm>
             <a:prstGeom prst="rect">
@@ -3269,13 +3490,13 @@
         </p:sp>
         <p:sp>
           <p:nvSpPr>
-            <p:cNvPr id="24" name="tx24"/>
+            <p:cNvPr id="29" name="tx29"/>
             <p:cNvSpPr/>
             <p:nvPr/>
           </p:nvSpPr>
           <p:spPr>
             <a:xfrm>
-              <a:off x="3015483" y="5785772"/>
+              <a:off x="3060542" y="5785772"/>
               <a:ext cx="124358" cy="80101"/>
             </a:xfrm>
             <a:prstGeom prst="rect">
@@ -3315,13 +3536,13 @@
         </p:sp>
         <p:sp>
           <p:nvSpPr>
-            <p:cNvPr id="25" name="tx25"/>
+            <p:cNvPr id="30" name="tx30"/>
             <p:cNvSpPr/>
             <p:nvPr/>
           </p:nvSpPr>
           <p:spPr>
             <a:xfrm>
-              <a:off x="5012436" y="5785772"/>
+              <a:off x="5041252" y="5785772"/>
               <a:ext cx="124358" cy="80101"/>
             </a:xfrm>
             <a:prstGeom prst="rect">
@@ -3361,13 +3582,13 @@
         </p:sp>
         <p:sp>
           <p:nvSpPr>
-            <p:cNvPr id="26" name="tx26"/>
+            <p:cNvPr id="31" name="tx31"/>
             <p:cNvSpPr/>
             <p:nvPr/>
           </p:nvSpPr>
           <p:spPr>
             <a:xfrm>
-              <a:off x="7009390" y="5785772"/>
+              <a:off x="7021962" y="5785772"/>
               <a:ext cx="124358" cy="80101"/>
             </a:xfrm>
             <a:prstGeom prst="rect">
@@ -3407,13 +3628,13 @@
         </p:sp>
         <p:sp>
           <p:nvSpPr>
-            <p:cNvPr id="27" name="tx27"/>
+            <p:cNvPr id="32" name="tx32"/>
             <p:cNvSpPr/>
             <p:nvPr/>
           </p:nvSpPr>
           <p:spPr>
             <a:xfrm>
-              <a:off x="4197162" y="5925448"/>
+              <a:off x="4228251" y="5925448"/>
               <a:ext cx="1195760" cy="100218"/>
             </a:xfrm>
             <a:prstGeom prst="rect">
@@ -3453,7 +3674,7 @@
         </p:sp>
         <p:sp>
           <p:nvSpPr>
-            <p:cNvPr id="28" name="tx28"/>
+            <p:cNvPr id="33" name="tx33"/>
             <p:cNvSpPr/>
             <p:nvPr/>
           </p:nvSpPr>
@@ -3499,13 +3720,13 @@
         </p:sp>
         <p:sp>
           <p:nvSpPr>
-            <p:cNvPr id="29" name="pl29"/>
+            <p:cNvPr id="34" name="pl34"/>
             <p:cNvSpPr/>
             <p:nvPr/>
           </p:nvSpPr>
           <p:spPr>
             <a:xfrm>
-              <a:off x="3578565" y="2264798"/>
+              <a:off x="3609655" y="2264798"/>
               <a:ext cx="175564" cy="0"/>
             </a:xfrm>
             <a:custGeom>
@@ -3539,13 +3760,13 @@
         </p:sp>
         <p:sp>
           <p:nvSpPr>
-            <p:cNvPr id="30" name="pl30"/>
+            <p:cNvPr id="35" name="pl35"/>
             <p:cNvSpPr/>
             <p:nvPr/>
           </p:nvSpPr>
           <p:spPr>
             <a:xfrm>
-              <a:off x="4819138" y="2264798"/>
+              <a:off x="4850228" y="2264798"/>
               <a:ext cx="175564" cy="0"/>
             </a:xfrm>
             <a:custGeom>
@@ -3579,13 +3800,13 @@
         </p:sp>
         <p:sp>
           <p:nvSpPr>
-            <p:cNvPr id="31" name="tx31"/>
+            <p:cNvPr id="36" name="tx36"/>
             <p:cNvSpPr/>
             <p:nvPr/>
           </p:nvSpPr>
           <p:spPr>
             <a:xfrm>
-              <a:off x="3845665" y="2224748"/>
+              <a:off x="3876754" y="2224748"/>
               <a:ext cx="881938" cy="80101"/>
             </a:xfrm>
             <a:prstGeom prst="rect">
@@ -3625,13 +3846,13 @@
         </p:sp>
         <p:sp>
           <p:nvSpPr>
-            <p:cNvPr id="32" name="tx32"/>
+            <p:cNvPr id="37" name="tx37"/>
             <p:cNvSpPr/>
             <p:nvPr/>
           </p:nvSpPr>
           <p:spPr>
             <a:xfrm>
-              <a:off x="5086238" y="2224748"/>
+              <a:off x="5117327" y="2224748"/>
               <a:ext cx="947226" cy="80101"/>
             </a:xfrm>
             <a:prstGeom prst="rect">
@@ -3671,13 +3892,13 @@
         </p:sp>
         <p:sp>
           <p:nvSpPr>
-            <p:cNvPr id="33" name="tx33"/>
+            <p:cNvPr id="38" name="tx38"/>
             <p:cNvSpPr/>
             <p:nvPr/>
           </p:nvSpPr>
           <p:spPr>
             <a:xfrm>
-              <a:off x="972874" y="1896563"/>
+              <a:off x="1035053" y="1896563"/>
               <a:ext cx="4337273" cy="91165"/>
             </a:xfrm>
             <a:prstGeom prst="rect">
@@ -3710,20 +3931,20 @@
                   <a:latin typeface="Helvetica"/>
                   <a:cs typeface="Helvetica"/>
                 </a:rPr>
-                <a:t>Discrep &gt;= +25 vs &lt;+25: HR = 2.60 (95% CI 0.68-9.90), p = 0.162   (Cox PH)</a:t>
+                <a:t>Discrep &gt;= +25 vs &lt;+25: HR = 1.77 (95% CI 0.44-7.17), p = 0.426   (Cox PH)</a:t>
               </a:r>
             </a:p>
           </p:txBody>
         </p:sp>
         <p:sp>
           <p:nvSpPr>
-            <p:cNvPr id="34" name="tx34"/>
+            <p:cNvPr id="39" name="tx39"/>
             <p:cNvSpPr/>
             <p:nvPr/>
           </p:nvSpPr>
           <p:spPr>
             <a:xfrm>
-              <a:off x="972874" y="1669789"/>
+              <a:off x="1035053" y="1669789"/>
               <a:ext cx="1033637" cy="120152"/>
             </a:xfrm>
             <a:prstGeom prst="rect">

--- a/docs/plots/carbo/jx_carbo_adjcif_death.pptx
+++ b/docs/plots/carbo/jx_carbo_adjcif_death.pptx
@@ -2271,21 +2271,21 @@
           </p:nvSpPr>
           <p:spPr>
             <a:xfrm>
-              <a:off x="1035053" y="5241861"/>
-              <a:ext cx="7582157" cy="0"/>
+              <a:off x="972874" y="5121983"/>
+              <a:ext cx="7644336" cy="0"/>
             </a:xfrm>
             <a:custGeom>
               <a:avLst/>
               <a:pathLst>
-                <a:path w="7582157" h="0">
+                <a:path w="7644336" h="0">
                   <a:moveTo>
                     <a:pt x="0" y="0"/>
                   </a:moveTo>
                   <a:lnTo>
-                    <a:pt x="7582157" y="0"/>
-                  </a:lnTo>
-                  <a:lnTo>
-                    <a:pt x="7582157" y="0"/>
+                    <a:pt x="7644336" y="0"/>
+                  </a:lnTo>
+                  <a:lnTo>
+                    <a:pt x="7644336" y="0"/>
                   </a:lnTo>
                 </a:path>
               </a:pathLst>
@@ -2314,21 +2314,21 @@
           </p:nvSpPr>
           <p:spPr>
             <a:xfrm>
-              <a:off x="1035053" y="4564738"/>
-              <a:ext cx="7582157" cy="0"/>
+              <a:off x="972874" y="4205104"/>
+              <a:ext cx="7644336" cy="0"/>
             </a:xfrm>
             <a:custGeom>
               <a:avLst/>
               <a:pathLst>
-                <a:path w="7582157" h="0">
+                <a:path w="7644336" h="0">
                   <a:moveTo>
                     <a:pt x="0" y="0"/>
                   </a:moveTo>
                   <a:lnTo>
-                    <a:pt x="7582157" y="0"/>
-                  </a:lnTo>
-                  <a:lnTo>
-                    <a:pt x="7582157" y="0"/>
+                    <a:pt x="7644336" y="0"/>
+                  </a:lnTo>
+                  <a:lnTo>
+                    <a:pt x="7644336" y="0"/>
                   </a:lnTo>
                 </a:path>
               </a:pathLst>
@@ -2357,21 +2357,21 @@
           </p:nvSpPr>
           <p:spPr>
             <a:xfrm>
-              <a:off x="1035053" y="3887616"/>
-              <a:ext cx="7582157" cy="0"/>
+              <a:off x="972874" y="3288226"/>
+              <a:ext cx="7644336" cy="0"/>
             </a:xfrm>
             <a:custGeom>
               <a:avLst/>
               <a:pathLst>
-                <a:path w="7582157" h="0">
+                <a:path w="7644336" h="0">
                   <a:moveTo>
                     <a:pt x="0" y="0"/>
                   </a:moveTo>
                   <a:lnTo>
-                    <a:pt x="7582157" y="0"/>
-                  </a:lnTo>
-                  <a:lnTo>
-                    <a:pt x="7582157" y="0"/>
+                    <a:pt x="7644336" y="0"/>
+                  </a:lnTo>
+                  <a:lnTo>
+                    <a:pt x="7644336" y="0"/>
                   </a:lnTo>
                 </a:path>
               </a:pathLst>
@@ -2400,21 +2400,21 @@
           </p:nvSpPr>
           <p:spPr>
             <a:xfrm>
-              <a:off x="1035053" y="3210494"/>
-              <a:ext cx="7582157" cy="0"/>
+              <a:off x="2079186" y="2583293"/>
+              <a:ext cx="0" cy="3139848"/>
             </a:xfrm>
             <a:custGeom>
               <a:avLst/>
               <a:pathLst>
-                <a:path w="7582157" h="0">
+                <a:path w="0" h="3139848">
                   <a:moveTo>
+                    <a:pt x="0" y="3139848"/>
+                  </a:moveTo>
+                  <a:lnTo>
                     <a:pt x="0" y="0"/>
-                  </a:moveTo>
-                  <a:lnTo>
-                    <a:pt x="7582157" y="0"/>
-                  </a:lnTo>
-                  <a:lnTo>
-                    <a:pt x="7582157" y="0"/>
+                  </a:lnTo>
+                  <a:lnTo>
+                    <a:pt x="0" y="0"/>
                   </a:lnTo>
                 </a:path>
               </a:pathLst>
@@ -2443,7 +2443,7 @@
           </p:nvSpPr>
           <p:spPr>
             <a:xfrm>
-              <a:off x="2132366" y="2583293"/>
+              <a:off x="4076139" y="2583293"/>
               <a:ext cx="0" cy="3139848"/>
             </a:xfrm>
             <a:custGeom>
@@ -2486,7 +2486,7 @@
           </p:nvSpPr>
           <p:spPr>
             <a:xfrm>
-              <a:off x="4113076" y="2583293"/>
+              <a:off x="6073092" y="2583293"/>
               <a:ext cx="0" cy="3139848"/>
             </a:xfrm>
             <a:custGeom>
@@ -2529,7 +2529,7 @@
           </p:nvSpPr>
           <p:spPr>
             <a:xfrm>
-              <a:off x="6093786" y="2583293"/>
+              <a:off x="8070045" y="2583293"/>
               <a:ext cx="0" cy="3139848"/>
             </a:xfrm>
             <a:custGeom>
@@ -2572,26 +2572,26 @@
           </p:nvSpPr>
           <p:spPr>
             <a:xfrm>
-              <a:off x="8074496" y="2583293"/>
-              <a:ext cx="0" cy="3139848"/>
+              <a:off x="972874" y="5580422"/>
+              <a:ext cx="7644336" cy="0"/>
             </a:xfrm>
             <a:custGeom>
               <a:avLst/>
               <a:pathLst>
-                <a:path w="0" h="3139848">
+                <a:path w="7644336" h="0">
                   <a:moveTo>
-                    <a:pt x="0" y="3139848"/>
+                    <a:pt x="0" y="0"/>
                   </a:moveTo>
                   <a:lnTo>
-                    <a:pt x="0" y="0"/>
-                  </a:lnTo>
-                  <a:lnTo>
-                    <a:pt x="0" y="0"/>
+                    <a:pt x="7644336" y="0"/>
+                  </a:lnTo>
+                  <a:lnTo>
+                    <a:pt x="7644336" y="0"/>
                   </a:lnTo>
                 </a:path>
               </a:pathLst>
             </a:custGeom>
-            <a:ln w="6775" cap="flat">
+            <a:ln w="13550" cap="flat">
               <a:solidFill>
                 <a:srgbClr val="EBEBEB">
                   <a:alpha val="100000"/>
@@ -2615,21 +2615,21 @@
           </p:nvSpPr>
           <p:spPr>
             <a:xfrm>
-              <a:off x="1035053" y="5580422"/>
-              <a:ext cx="7582157" cy="0"/>
+              <a:off x="972874" y="4663543"/>
+              <a:ext cx="7644336" cy="0"/>
             </a:xfrm>
             <a:custGeom>
               <a:avLst/>
               <a:pathLst>
-                <a:path w="7582157" h="0">
+                <a:path w="7644336" h="0">
                   <a:moveTo>
                     <a:pt x="0" y="0"/>
                   </a:moveTo>
                   <a:lnTo>
-                    <a:pt x="7582157" y="0"/>
-                  </a:lnTo>
-                  <a:lnTo>
-                    <a:pt x="7582157" y="0"/>
+                    <a:pt x="7644336" y="0"/>
+                  </a:lnTo>
+                  <a:lnTo>
+                    <a:pt x="7644336" y="0"/>
                   </a:lnTo>
                 </a:path>
               </a:pathLst>
@@ -2658,21 +2658,21 @@
           </p:nvSpPr>
           <p:spPr>
             <a:xfrm>
-              <a:off x="1035053" y="4903299"/>
-              <a:ext cx="7582157" cy="0"/>
+              <a:off x="972874" y="3746665"/>
+              <a:ext cx="7644336" cy="0"/>
             </a:xfrm>
             <a:custGeom>
               <a:avLst/>
               <a:pathLst>
-                <a:path w="7582157" h="0">
+                <a:path w="7644336" h="0">
                   <a:moveTo>
                     <a:pt x="0" y="0"/>
                   </a:moveTo>
                   <a:lnTo>
-                    <a:pt x="7582157" y="0"/>
-                  </a:lnTo>
-                  <a:lnTo>
-                    <a:pt x="7582157" y="0"/>
+                    <a:pt x="7644336" y="0"/>
+                  </a:lnTo>
+                  <a:lnTo>
+                    <a:pt x="7644336" y="0"/>
                   </a:lnTo>
                 </a:path>
               </a:pathLst>
@@ -2701,21 +2701,21 @@
           </p:nvSpPr>
           <p:spPr>
             <a:xfrm>
-              <a:off x="1035053" y="4226177"/>
-              <a:ext cx="7582157" cy="0"/>
+              <a:off x="972874" y="2829787"/>
+              <a:ext cx="7644336" cy="0"/>
             </a:xfrm>
             <a:custGeom>
               <a:avLst/>
               <a:pathLst>
-                <a:path w="7582157" h="0">
+                <a:path w="7644336" h="0">
                   <a:moveTo>
                     <a:pt x="0" y="0"/>
                   </a:moveTo>
                   <a:lnTo>
-                    <a:pt x="7582157" y="0"/>
-                  </a:lnTo>
-                  <a:lnTo>
-                    <a:pt x="7582157" y="0"/>
+                    <a:pt x="7644336" y="0"/>
+                  </a:lnTo>
+                  <a:lnTo>
+                    <a:pt x="7644336" y="0"/>
                   </a:lnTo>
                 </a:path>
               </a:pathLst>
@@ -2744,21 +2744,21 @@
           </p:nvSpPr>
           <p:spPr>
             <a:xfrm>
-              <a:off x="1035053" y="3549055"/>
-              <a:ext cx="7582157" cy="0"/>
+              <a:off x="1080709" y="2583293"/>
+              <a:ext cx="0" cy="3139848"/>
             </a:xfrm>
             <a:custGeom>
               <a:avLst/>
               <a:pathLst>
-                <a:path w="7582157" h="0">
+                <a:path w="0" h="3139848">
                   <a:moveTo>
+                    <a:pt x="0" y="3139848"/>
+                  </a:moveTo>
+                  <a:lnTo>
                     <a:pt x="0" y="0"/>
-                  </a:moveTo>
-                  <a:lnTo>
-                    <a:pt x="7582157" y="0"/>
-                  </a:lnTo>
-                  <a:lnTo>
-                    <a:pt x="7582157" y="0"/>
+                  </a:lnTo>
+                  <a:lnTo>
+                    <a:pt x="0" y="0"/>
                   </a:lnTo>
                 </a:path>
               </a:pathLst>
@@ -2787,21 +2787,21 @@
           </p:nvSpPr>
           <p:spPr>
             <a:xfrm>
-              <a:off x="1035053" y="2871932"/>
-              <a:ext cx="7582157" cy="0"/>
+              <a:off x="3077663" y="2583293"/>
+              <a:ext cx="0" cy="3139848"/>
             </a:xfrm>
             <a:custGeom>
               <a:avLst/>
               <a:pathLst>
-                <a:path w="7582157" h="0">
+                <a:path w="0" h="3139848">
                   <a:moveTo>
+                    <a:pt x="0" y="3139848"/>
+                  </a:moveTo>
+                  <a:lnTo>
                     <a:pt x="0" y="0"/>
-                  </a:moveTo>
-                  <a:lnTo>
-                    <a:pt x="7582157" y="0"/>
-                  </a:lnTo>
-                  <a:lnTo>
-                    <a:pt x="7582157" y="0"/>
+                  </a:lnTo>
+                  <a:lnTo>
+                    <a:pt x="0" y="0"/>
                   </a:lnTo>
                 </a:path>
               </a:pathLst>
@@ -2830,7 +2830,7 @@
           </p:nvSpPr>
           <p:spPr>
             <a:xfrm>
-              <a:off x="1142011" y="2583293"/>
+              <a:off x="5074616" y="2583293"/>
               <a:ext cx="0" cy="3139848"/>
             </a:xfrm>
             <a:custGeom>
@@ -2873,7 +2873,7 @@
           </p:nvSpPr>
           <p:spPr>
             <a:xfrm>
-              <a:off x="3122721" y="2583293"/>
+              <a:off x="7071569" y="2583293"/>
               <a:ext cx="0" cy="3139848"/>
             </a:xfrm>
             <a:custGeom>
@@ -2916,28 +2916,94 @@
           </p:nvSpPr>
           <p:spPr>
             <a:xfrm>
-              <a:off x="5103431" y="2583293"/>
-              <a:ext cx="0" cy="3139848"/>
+              <a:off x="1320344" y="4248275"/>
+              <a:ext cx="6949396" cy="1204597"/>
             </a:xfrm>
             <a:custGeom>
               <a:avLst/>
               <a:pathLst>
-                <a:path w="0" h="3139848">
+                <a:path w="6949396" h="1204597">
                   <a:moveTo>
-                    <a:pt x="0" y="3139848"/>
+                    <a:pt x="0" y="1204597"/>
                   </a:moveTo>
                   <a:lnTo>
-                    <a:pt x="0" y="0"/>
-                  </a:lnTo>
-                  <a:lnTo>
-                    <a:pt x="0" y="0"/>
+                    <a:pt x="718903" y="1204597"/>
+                  </a:lnTo>
+                  <a:lnTo>
+                    <a:pt x="718903" y="1204597"/>
+                  </a:lnTo>
+                  <a:lnTo>
+                    <a:pt x="958537" y="1204597"/>
+                  </a:lnTo>
+                  <a:lnTo>
+                    <a:pt x="958537" y="1076065"/>
+                  </a:lnTo>
+                  <a:lnTo>
+                    <a:pt x="1517684" y="1076065"/>
+                  </a:lnTo>
+                  <a:lnTo>
+                    <a:pt x="1517684" y="945535"/>
+                  </a:lnTo>
+                  <a:lnTo>
+                    <a:pt x="1757318" y="945535"/>
+                  </a:lnTo>
+                  <a:lnTo>
+                    <a:pt x="1757318" y="813624"/>
+                  </a:lnTo>
+                  <a:lnTo>
+                    <a:pt x="1996953" y="813624"/>
+                  </a:lnTo>
+                  <a:lnTo>
+                    <a:pt x="1996953" y="681828"/>
+                  </a:lnTo>
+                  <a:lnTo>
+                    <a:pt x="2076831" y="681828"/>
+                  </a:lnTo>
+                  <a:lnTo>
+                    <a:pt x="2076831" y="549134"/>
+                  </a:lnTo>
+                  <a:lnTo>
+                    <a:pt x="2156709" y="549134"/>
+                  </a:lnTo>
+                  <a:lnTo>
+                    <a:pt x="2156709" y="412353"/>
+                  </a:lnTo>
+                  <a:lnTo>
+                    <a:pt x="4153662" y="412353"/>
+                  </a:lnTo>
+                  <a:lnTo>
+                    <a:pt x="4153662" y="275474"/>
+                  </a:lnTo>
+                  <a:lnTo>
+                    <a:pt x="5990859" y="275474"/>
+                  </a:lnTo>
+                  <a:lnTo>
+                    <a:pt x="5990859" y="138883"/>
+                  </a:lnTo>
+                  <a:lnTo>
+                    <a:pt x="6230493" y="138883"/>
+                  </a:lnTo>
+                  <a:lnTo>
+                    <a:pt x="6230493" y="0"/>
+                  </a:lnTo>
+                  <a:lnTo>
+                    <a:pt x="6390249" y="0"/>
+                  </a:lnTo>
+                  <a:lnTo>
+                    <a:pt x="6390249" y="0"/>
+                  </a:lnTo>
+                  <a:lnTo>
+                    <a:pt x="6949396" y="0"/>
+                  </a:lnTo>
+                  <a:lnTo>
+                    <a:pt x="6949396" y="0"/>
                   </a:lnTo>
                 </a:path>
               </a:pathLst>
             </a:custGeom>
-            <a:ln w="13550" cap="flat">
+            <a:ln w="27101" cap="flat">
               <a:solidFill>
-                <a:srgbClr val="EBEBEB">
+                <a:srgbClr val="1F78B4">
                   <a:alpha val="100000"/>
                 </a:srgbClr>
               </a:solidFill>
@@ -2959,239 +3025,87 @@
           </p:nvSpPr>
           <p:spPr>
             <a:xfrm>
-              <a:off x="7084141" y="2583293"/>
-              <a:ext cx="0" cy="3139848"/>
+              <a:off x="1320344" y="2861938"/>
+              <a:ext cx="6949396" cy="2445029"/>
             </a:xfrm>
             <a:custGeom>
               <a:avLst/>
               <a:pathLst>
-                <a:path w="0" h="3139848">
+                <a:path w="6949396" h="2445029">
                   <a:moveTo>
-                    <a:pt x="0" y="3139848"/>
+                    <a:pt x="0" y="2445029"/>
                   </a:moveTo>
                   <a:lnTo>
-                    <a:pt x="0" y="0"/>
-                  </a:lnTo>
-                  <a:lnTo>
-                    <a:pt x="0" y="0"/>
-                  </a:lnTo>
-                </a:path>
-              </a:pathLst>
-            </a:custGeom>
-            <a:ln w="13550" cap="flat">
-              <a:solidFill>
-                <a:srgbClr val="EBEBEB">
-                  <a:alpha val="100000"/>
-                </a:srgbClr>
-              </a:solidFill>
-              <a:prstDash val="solid"/>
-              <a:round/>
-            </a:ln>
-          </p:spPr>
-          <p:txBody>
-            <a:bodyPr/>
-            <a:lstStyle/>
-            <a:p/>
-          </p:txBody>
-        </p:sp>
-        <p:sp>
-          <p:nvSpPr>
-            <p:cNvPr id="21" name="pl21"/>
-            <p:cNvSpPr/>
-            <p:nvPr/>
-          </p:nvSpPr>
-          <p:spPr>
-            <a:xfrm>
-              <a:off x="1379697" y="3930708"/>
-              <a:ext cx="6892870" cy="1489037"/>
-            </a:xfrm>
-            <a:custGeom>
-              <a:avLst/>
-              <a:pathLst>
-                <a:path w="6892870" h="1489037">
-                  <a:moveTo>
-                    <a:pt x="0" y="1489037"/>
-                  </a:moveTo>
-                  <a:lnTo>
-                    <a:pt x="713055" y="1489037"/>
-                  </a:lnTo>
-                  <a:lnTo>
-                    <a:pt x="713055" y="1489037"/>
-                  </a:lnTo>
-                  <a:lnTo>
-                    <a:pt x="950740" y="1489037"/>
-                  </a:lnTo>
-                  <a:lnTo>
-                    <a:pt x="950740" y="1330477"/>
-                  </a:lnTo>
-                  <a:lnTo>
-                    <a:pt x="1505339" y="1330477"/>
-                  </a:lnTo>
-                  <a:lnTo>
-                    <a:pt x="1505339" y="1168667"/>
-                  </a:lnTo>
-                  <a:lnTo>
-                    <a:pt x="1743024" y="1168667"/>
-                  </a:lnTo>
-                  <a:lnTo>
-                    <a:pt x="1743024" y="1003373"/>
-                  </a:lnTo>
-                  <a:lnTo>
-                    <a:pt x="1980709" y="1003373"/>
-                  </a:lnTo>
-                  <a:lnTo>
-                    <a:pt x="1980709" y="840307"/>
-                  </a:lnTo>
-                  <a:lnTo>
-                    <a:pt x="2059938" y="840307"/>
-                  </a:lnTo>
-                  <a:lnTo>
-                    <a:pt x="2059938" y="679581"/>
-                  </a:lnTo>
-                  <a:lnTo>
-                    <a:pt x="2139166" y="679581"/>
-                  </a:lnTo>
-                  <a:lnTo>
-                    <a:pt x="2139166" y="515254"/>
-                  </a:lnTo>
-                  <a:lnTo>
-                    <a:pt x="4119876" y="515254"/>
-                  </a:lnTo>
-                  <a:lnTo>
-                    <a:pt x="4119876" y="342908"/>
-                  </a:lnTo>
-                  <a:lnTo>
-                    <a:pt x="5942129" y="342908"/>
-                  </a:lnTo>
-                  <a:lnTo>
-                    <a:pt x="5942129" y="173672"/>
-                  </a:lnTo>
-                  <a:lnTo>
-                    <a:pt x="6179814" y="173672"/>
-                  </a:lnTo>
-                  <a:lnTo>
-                    <a:pt x="6179814" y="0"/>
-                  </a:lnTo>
-                  <a:lnTo>
-                    <a:pt x="6338271" y="0"/>
-                  </a:lnTo>
-                  <a:lnTo>
-                    <a:pt x="6338271" y="0"/>
-                  </a:lnTo>
-                  <a:lnTo>
-                    <a:pt x="6892870" y="0"/>
-                  </a:lnTo>
-                  <a:lnTo>
-                    <a:pt x="6892870" y="0"/>
-                  </a:lnTo>
-                </a:path>
-              </a:pathLst>
-            </a:custGeom>
-            <a:ln w="27101" cap="flat">
-              <a:solidFill>
-                <a:srgbClr val="1F78B4">
-                  <a:alpha val="100000"/>
-                </a:srgbClr>
-              </a:solidFill>
-              <a:prstDash val="solid"/>
-              <a:round/>
-            </a:ln>
-          </p:spPr>
-          <p:txBody>
-            <a:bodyPr/>
-            <a:lstStyle/>
-            <a:p/>
-          </p:txBody>
-        </p:sp>
-        <p:sp>
-          <p:nvSpPr>
-            <p:cNvPr id="22" name="pl22"/>
-            <p:cNvSpPr/>
-            <p:nvPr/>
-          </p:nvSpPr>
-          <p:spPr>
-            <a:xfrm>
-              <a:off x="1379697" y="2861938"/>
-              <a:ext cx="6892870" cy="2437033"/>
-            </a:xfrm>
-            <a:custGeom>
-              <a:avLst/>
-              <a:pathLst>
-                <a:path w="6892870" h="2437033">
-                  <a:moveTo>
-                    <a:pt x="0" y="2437033"/>
-                  </a:moveTo>
-                  <a:lnTo>
-                    <a:pt x="713055" y="2437033"/>
-                  </a:lnTo>
-                  <a:lnTo>
-                    <a:pt x="713055" y="2437033"/>
-                  </a:lnTo>
-                  <a:lnTo>
-                    <a:pt x="950740" y="2437033"/>
-                  </a:lnTo>
-                  <a:lnTo>
-                    <a:pt x="950740" y="2163758"/>
-                  </a:lnTo>
-                  <a:lnTo>
-                    <a:pt x="1505339" y="2163758"/>
-                  </a:lnTo>
-                  <a:lnTo>
-                    <a:pt x="1505339" y="1889038"/>
-                  </a:lnTo>
-                  <a:lnTo>
-                    <a:pt x="1743024" y="1889038"/>
-                  </a:lnTo>
-                  <a:lnTo>
-                    <a:pt x="1743024" y="1612345"/>
-                  </a:lnTo>
-                  <a:lnTo>
-                    <a:pt x="1980709" y="1612345"/>
-                  </a:lnTo>
-                  <a:lnTo>
-                    <a:pt x="1980709" y="1342930"/>
-                  </a:lnTo>
-                  <a:lnTo>
-                    <a:pt x="2059938" y="1342930"/>
-                  </a:lnTo>
-                  <a:lnTo>
-                    <a:pt x="2059938" y="1080526"/>
-                  </a:lnTo>
-                  <a:lnTo>
-                    <a:pt x="2139166" y="1080526"/>
-                  </a:lnTo>
-                  <a:lnTo>
-                    <a:pt x="2139166" y="815192"/>
-                  </a:lnTo>
-                  <a:lnTo>
-                    <a:pt x="4119876" y="815192"/>
-                  </a:lnTo>
-                  <a:lnTo>
-                    <a:pt x="4119876" y="539843"/>
-                  </a:lnTo>
-                  <a:lnTo>
-                    <a:pt x="5942129" y="539843"/>
-                  </a:lnTo>
-                  <a:lnTo>
-                    <a:pt x="5942129" y="272151"/>
-                  </a:lnTo>
-                  <a:lnTo>
-                    <a:pt x="6179814" y="272151"/>
-                  </a:lnTo>
-                  <a:lnTo>
-                    <a:pt x="6179814" y="0"/>
-                  </a:lnTo>
-                  <a:lnTo>
-                    <a:pt x="6338271" y="0"/>
-                  </a:lnTo>
-                  <a:lnTo>
-                    <a:pt x="6338271" y="0"/>
-                  </a:lnTo>
-                  <a:lnTo>
-                    <a:pt x="6892870" y="0"/>
-                  </a:lnTo>
-                  <a:lnTo>
-                    <a:pt x="6892870" y="0"/>
+                    <a:pt x="718903" y="2445029"/>
+                  </a:lnTo>
+                  <a:lnTo>
+                    <a:pt x="718903" y="2445029"/>
+                  </a:lnTo>
+                  <a:lnTo>
+                    <a:pt x="958537" y="2445029"/>
+                  </a:lnTo>
+                  <a:lnTo>
+                    <a:pt x="958537" y="2172338"/>
+                  </a:lnTo>
+                  <a:lnTo>
+                    <a:pt x="1517684" y="2172338"/>
+                  </a:lnTo>
+                  <a:lnTo>
+                    <a:pt x="1517684" y="1898338"/>
+                  </a:lnTo>
+                  <a:lnTo>
+                    <a:pt x="1757318" y="1898338"/>
+                  </a:lnTo>
+                  <a:lnTo>
+                    <a:pt x="1757318" y="1624420"/>
+                  </a:lnTo>
+                  <a:lnTo>
+                    <a:pt x="1996953" y="1624420"/>
+                  </a:lnTo>
+                  <a:lnTo>
+                    <a:pt x="1996953" y="1353715"/>
+                  </a:lnTo>
+                  <a:lnTo>
+                    <a:pt x="2076831" y="1353715"/>
+                  </a:lnTo>
+                  <a:lnTo>
+                    <a:pt x="2076831" y="1084148"/>
+                  </a:lnTo>
+                  <a:lnTo>
+                    <a:pt x="2156709" y="1084148"/>
+                  </a:lnTo>
+                  <a:lnTo>
+                    <a:pt x="2156709" y="809392"/>
+                  </a:lnTo>
+                  <a:lnTo>
+                    <a:pt x="4153662" y="809392"/>
+                  </a:lnTo>
+                  <a:lnTo>
+                    <a:pt x="4153662" y="537582"/>
+                  </a:lnTo>
+                  <a:lnTo>
+                    <a:pt x="5990859" y="537582"/>
+                  </a:lnTo>
+                  <a:lnTo>
+                    <a:pt x="5990859" y="269458"/>
+                  </a:lnTo>
+                  <a:lnTo>
+                    <a:pt x="6230493" y="269458"/>
+                  </a:lnTo>
+                  <a:lnTo>
+                    <a:pt x="6230493" y="0"/>
+                  </a:lnTo>
+                  <a:lnTo>
+                    <a:pt x="6390249" y="0"/>
+                  </a:lnTo>
+                  <a:lnTo>
+                    <a:pt x="6390249" y="0"/>
+                  </a:lnTo>
+                  <a:lnTo>
+                    <a:pt x="6949396" y="0"/>
+                  </a:lnTo>
+                  <a:lnTo>
+                    <a:pt x="6949396" y="0"/>
                   </a:lnTo>
                 </a:path>
               </a:pathLst>
@@ -3214,14 +3128,14 @@
         </p:sp>
         <p:sp>
           <p:nvSpPr>
-            <p:cNvPr id="23" name="tx23"/>
+            <p:cNvPr id="21" name="tx21"/>
             <p:cNvSpPr/>
             <p:nvPr/>
           </p:nvSpPr>
           <p:spPr>
             <a:xfrm>
               <a:off x="692708" y="5540371"/>
-              <a:ext cx="279714" cy="80101"/>
+              <a:ext cx="217535" cy="80101"/>
             </a:xfrm>
             <a:prstGeom prst="rect">
               <a:avLst/>
@@ -3253,21 +3167,21 @@
                   <a:latin typeface="Helvetica"/>
                   <a:cs typeface="Helvetica"/>
                 </a:rPr>
-                <a:t>0.000</a:t>
+                <a:t>0.00</a:t>
               </a:r>
             </a:p>
           </p:txBody>
         </p:sp>
         <p:sp>
           <p:nvSpPr>
-            <p:cNvPr id="24" name="tx24"/>
+            <p:cNvPr id="22" name="tx22"/>
             <p:cNvSpPr/>
             <p:nvPr/>
           </p:nvSpPr>
           <p:spPr>
             <a:xfrm>
-              <a:off x="692708" y="4863249"/>
-              <a:ext cx="279714" cy="80101"/>
+              <a:off x="692708" y="4623493"/>
+              <a:ext cx="217535" cy="80101"/>
             </a:xfrm>
             <a:prstGeom prst="rect">
               <a:avLst/>
@@ -3299,21 +3213,21 @@
                   <a:latin typeface="Helvetica"/>
                   <a:cs typeface="Helvetica"/>
                 </a:rPr>
-                <a:t>0.025</a:t>
+                <a:t>0.04</a:t>
               </a:r>
             </a:p>
           </p:txBody>
         </p:sp>
         <p:sp>
           <p:nvSpPr>
-            <p:cNvPr id="25" name="tx25"/>
+            <p:cNvPr id="23" name="tx23"/>
             <p:cNvSpPr/>
             <p:nvPr/>
           </p:nvSpPr>
           <p:spPr>
             <a:xfrm>
-              <a:off x="692708" y="4186126"/>
-              <a:ext cx="279714" cy="80101"/>
+              <a:off x="692708" y="3706614"/>
+              <a:ext cx="217535" cy="80101"/>
             </a:xfrm>
             <a:prstGeom prst="rect">
               <a:avLst/>
@@ -3345,21 +3259,21 @@
                   <a:latin typeface="Helvetica"/>
                   <a:cs typeface="Helvetica"/>
                 </a:rPr>
-                <a:t>0.050</a:t>
+                <a:t>0.08</a:t>
               </a:r>
             </a:p>
           </p:txBody>
         </p:sp>
         <p:sp>
           <p:nvSpPr>
-            <p:cNvPr id="26" name="tx26"/>
+            <p:cNvPr id="24" name="tx24"/>
             <p:cNvSpPr/>
             <p:nvPr/>
           </p:nvSpPr>
           <p:spPr>
             <a:xfrm>
-              <a:off x="692708" y="3509004"/>
-              <a:ext cx="279714" cy="80101"/>
+              <a:off x="692708" y="2789736"/>
+              <a:ext cx="217535" cy="80101"/>
             </a:xfrm>
             <a:prstGeom prst="rect">
               <a:avLst/>
@@ -3391,66 +3305,20 @@
                   <a:latin typeface="Helvetica"/>
                   <a:cs typeface="Helvetica"/>
                 </a:rPr>
-                <a:t>0.075</a:t>
+                <a:t>0.12</a:t>
               </a:r>
             </a:p>
           </p:txBody>
         </p:sp>
         <p:sp>
           <p:nvSpPr>
-            <p:cNvPr id="27" name="tx27"/>
+            <p:cNvPr id="25" name="tx25"/>
             <p:cNvSpPr/>
             <p:nvPr/>
           </p:nvSpPr>
           <p:spPr>
             <a:xfrm>
-              <a:off x="692708" y="2831882"/>
-              <a:ext cx="279714" cy="80101"/>
-            </a:xfrm>
-            <a:prstGeom prst="rect">
-              <a:avLst/>
-            </a:prstGeom>
-            <a:noFill/>
-          </p:spPr>
-          <p:txBody>
-            <a:bodyPr lIns="0" rIns="0" tIns="0" bIns="0" anchorCtr="1" anchor="ctr" wrap="none"/>
-            <a:lstStyle/>
-            <a:p>
-              <a:pPr algn="l" marL="0" marR="0" indent="0">
-                <a:lnSpc>
-                  <a:spcPts val="880"/>
-                </a:lnSpc>
-                <a:spcBef>
-                  <a:spcPts val="0"/>
-                </a:spcBef>
-                <a:spcAft>
-                  <a:spcPts val="0"/>
-                </a:spcAft>
-              </a:pPr>
-              <a:r>
-                <a:rPr sz="880">
-                  <a:solidFill>
-                    <a:srgbClr val="4D4D4D">
-                      <a:alpha val="100000"/>
-                    </a:srgbClr>
-                  </a:solidFill>
-                  <a:latin typeface="Helvetica"/>
-                  <a:cs typeface="Helvetica"/>
-                </a:rPr>
-                <a:t>0.100</a:t>
-              </a:r>
-            </a:p>
-          </p:txBody>
-        </p:sp>
-        <p:sp>
-          <p:nvSpPr>
-            <p:cNvPr id="28" name="tx28"/>
-            <p:cNvSpPr/>
-            <p:nvPr/>
-          </p:nvSpPr>
-          <p:spPr>
-            <a:xfrm>
-              <a:off x="1110922" y="5785772"/>
+              <a:off x="1049620" y="5785772"/>
               <a:ext cx="62179" cy="80101"/>
             </a:xfrm>
             <a:prstGeom prst="rect">
@@ -3490,13 +3358,13 @@
         </p:sp>
         <p:sp>
           <p:nvSpPr>
-            <p:cNvPr id="29" name="tx29"/>
+            <p:cNvPr id="26" name="tx26"/>
             <p:cNvSpPr/>
             <p:nvPr/>
           </p:nvSpPr>
           <p:spPr>
             <a:xfrm>
-              <a:off x="3060542" y="5785772"/>
+              <a:off x="3015483" y="5785772"/>
               <a:ext cx="124358" cy="80101"/>
             </a:xfrm>
             <a:prstGeom prst="rect">
@@ -3536,13 +3404,13 @@
         </p:sp>
         <p:sp>
           <p:nvSpPr>
-            <p:cNvPr id="30" name="tx30"/>
+            <p:cNvPr id="27" name="tx27"/>
             <p:cNvSpPr/>
             <p:nvPr/>
           </p:nvSpPr>
           <p:spPr>
             <a:xfrm>
-              <a:off x="5041252" y="5785772"/>
+              <a:off x="5012436" y="5785772"/>
               <a:ext cx="124358" cy="80101"/>
             </a:xfrm>
             <a:prstGeom prst="rect">
@@ -3582,13 +3450,13 @@
         </p:sp>
         <p:sp>
           <p:nvSpPr>
-            <p:cNvPr id="31" name="tx31"/>
+            <p:cNvPr id="28" name="tx28"/>
             <p:cNvSpPr/>
             <p:nvPr/>
           </p:nvSpPr>
           <p:spPr>
             <a:xfrm>
-              <a:off x="7021962" y="5785772"/>
+              <a:off x="7009390" y="5785772"/>
               <a:ext cx="124358" cy="80101"/>
             </a:xfrm>
             <a:prstGeom prst="rect">
@@ -3628,13 +3496,13 @@
         </p:sp>
         <p:sp>
           <p:nvSpPr>
-            <p:cNvPr id="32" name="tx32"/>
+            <p:cNvPr id="29" name="tx29"/>
             <p:cNvSpPr/>
             <p:nvPr/>
           </p:nvSpPr>
           <p:spPr>
             <a:xfrm>
-              <a:off x="4228251" y="5925448"/>
+              <a:off x="4197162" y="5925448"/>
               <a:ext cx="1195760" cy="100218"/>
             </a:xfrm>
             <a:prstGeom prst="rect">
@@ -3674,7 +3542,7 @@
         </p:sp>
         <p:sp>
           <p:nvSpPr>
-            <p:cNvPr id="33" name="tx33"/>
+            <p:cNvPr id="30" name="tx30"/>
             <p:cNvSpPr/>
             <p:nvPr/>
           </p:nvSpPr>
@@ -3720,13 +3588,13 @@
         </p:sp>
         <p:sp>
           <p:nvSpPr>
-            <p:cNvPr id="34" name="pl34"/>
+            <p:cNvPr id="31" name="pl31"/>
             <p:cNvSpPr/>
             <p:nvPr/>
           </p:nvSpPr>
           <p:spPr>
             <a:xfrm>
-              <a:off x="3609655" y="2264798"/>
+              <a:off x="3578565" y="2264798"/>
               <a:ext cx="175564" cy="0"/>
             </a:xfrm>
             <a:custGeom>
@@ -3760,13 +3628,13 @@
         </p:sp>
         <p:sp>
           <p:nvSpPr>
-            <p:cNvPr id="35" name="pl35"/>
+            <p:cNvPr id="32" name="pl32"/>
             <p:cNvSpPr/>
             <p:nvPr/>
           </p:nvSpPr>
           <p:spPr>
             <a:xfrm>
-              <a:off x="4850228" y="2264798"/>
+              <a:off x="4819138" y="2264798"/>
               <a:ext cx="175564" cy="0"/>
             </a:xfrm>
             <a:custGeom>
@@ -3800,13 +3668,13 @@
         </p:sp>
         <p:sp>
           <p:nvSpPr>
-            <p:cNvPr id="36" name="tx36"/>
+            <p:cNvPr id="33" name="tx33"/>
             <p:cNvSpPr/>
             <p:nvPr/>
           </p:nvSpPr>
           <p:spPr>
             <a:xfrm>
-              <a:off x="3876754" y="2224748"/>
+              <a:off x="3845665" y="2224748"/>
               <a:ext cx="881938" cy="80101"/>
             </a:xfrm>
             <a:prstGeom prst="rect">
@@ -3846,13 +3714,13 @@
         </p:sp>
         <p:sp>
           <p:nvSpPr>
-            <p:cNvPr id="37" name="tx37"/>
+            <p:cNvPr id="34" name="tx34"/>
             <p:cNvSpPr/>
             <p:nvPr/>
           </p:nvSpPr>
           <p:spPr>
             <a:xfrm>
-              <a:off x="5117327" y="2224748"/>
+              <a:off x="5086238" y="2224748"/>
               <a:ext cx="947226" cy="80101"/>
             </a:xfrm>
             <a:prstGeom prst="rect">
@@ -3892,13 +3760,13 @@
         </p:sp>
         <p:sp>
           <p:nvSpPr>
-            <p:cNvPr id="38" name="tx38"/>
+            <p:cNvPr id="35" name="tx35"/>
             <p:cNvSpPr/>
             <p:nvPr/>
           </p:nvSpPr>
           <p:spPr>
             <a:xfrm>
-              <a:off x="1035053" y="1896563"/>
+              <a:off x="972874" y="1896563"/>
               <a:ext cx="4337273" cy="91165"/>
             </a:xfrm>
             <a:prstGeom prst="rect">
@@ -3931,20 +3799,20 @@
                   <a:latin typeface="Helvetica"/>
                   <a:cs typeface="Helvetica"/>
                 </a:rPr>
-                <a:t>Discrep &gt;= +25 vs &lt;+25: HR = 1.77 (95% CI 0.44-7.17), p = 0.426   (Cox PH)</a:t>
+                <a:t>Discrep &gt;= +25 vs &lt;+25: HR = 2.16 (95% CI 0.58-7.96), p = 0.249   (Cox PH)</a:t>
               </a:r>
             </a:p>
           </p:txBody>
         </p:sp>
         <p:sp>
           <p:nvSpPr>
-            <p:cNvPr id="39" name="tx39"/>
+            <p:cNvPr id="36" name="tx36"/>
             <p:cNvSpPr/>
             <p:nvPr/>
           </p:nvSpPr>
           <p:spPr>
             <a:xfrm>
-              <a:off x="1035053" y="1669789"/>
+              <a:off x="972874" y="1669789"/>
               <a:ext cx="1033637" cy="120152"/>
             </a:xfrm>
             <a:prstGeom prst="rect">

--- a/docs/plots/carbo/jx_carbo_adjcif_death.pptx
+++ b/docs/plots/carbo/jx_carbo_adjcif_death.pptx
@@ -2271,21 +2271,21 @@
           </p:nvSpPr>
           <p:spPr>
             <a:xfrm>
-              <a:off x="972874" y="5121983"/>
-              <a:ext cx="7644336" cy="0"/>
+              <a:off x="1035053" y="5241861"/>
+              <a:ext cx="7582157" cy="0"/>
             </a:xfrm>
             <a:custGeom>
               <a:avLst/>
               <a:pathLst>
-                <a:path w="7644336" h="0">
+                <a:path w="7582157" h="0">
                   <a:moveTo>
                     <a:pt x="0" y="0"/>
                   </a:moveTo>
                   <a:lnTo>
-                    <a:pt x="7644336" y="0"/>
-                  </a:lnTo>
-                  <a:lnTo>
-                    <a:pt x="7644336" y="0"/>
+                    <a:pt x="7582157" y="0"/>
+                  </a:lnTo>
+                  <a:lnTo>
+                    <a:pt x="7582157" y="0"/>
                   </a:lnTo>
                 </a:path>
               </a:pathLst>
@@ -2314,21 +2314,21 @@
           </p:nvSpPr>
           <p:spPr>
             <a:xfrm>
-              <a:off x="972874" y="4205104"/>
-              <a:ext cx="7644336" cy="0"/>
+              <a:off x="1035053" y="4564738"/>
+              <a:ext cx="7582157" cy="0"/>
             </a:xfrm>
             <a:custGeom>
               <a:avLst/>
               <a:pathLst>
-                <a:path w="7644336" h="0">
+                <a:path w="7582157" h="0">
                   <a:moveTo>
                     <a:pt x="0" y="0"/>
                   </a:moveTo>
                   <a:lnTo>
-                    <a:pt x="7644336" y="0"/>
-                  </a:lnTo>
-                  <a:lnTo>
-                    <a:pt x="7644336" y="0"/>
+                    <a:pt x="7582157" y="0"/>
+                  </a:lnTo>
+                  <a:lnTo>
+                    <a:pt x="7582157" y="0"/>
                   </a:lnTo>
                 </a:path>
               </a:pathLst>
@@ -2357,21 +2357,21 @@
           </p:nvSpPr>
           <p:spPr>
             <a:xfrm>
-              <a:off x="972874" y="3288226"/>
-              <a:ext cx="7644336" cy="0"/>
+              <a:off x="1035053" y="3887616"/>
+              <a:ext cx="7582157" cy="0"/>
             </a:xfrm>
             <a:custGeom>
               <a:avLst/>
               <a:pathLst>
-                <a:path w="7644336" h="0">
+                <a:path w="7582157" h="0">
                   <a:moveTo>
                     <a:pt x="0" y="0"/>
                   </a:moveTo>
                   <a:lnTo>
-                    <a:pt x="7644336" y="0"/>
-                  </a:lnTo>
-                  <a:lnTo>
-                    <a:pt x="7644336" y="0"/>
+                    <a:pt x="7582157" y="0"/>
+                  </a:lnTo>
+                  <a:lnTo>
+                    <a:pt x="7582157" y="0"/>
                   </a:lnTo>
                 </a:path>
               </a:pathLst>
@@ -2400,21 +2400,21 @@
           </p:nvSpPr>
           <p:spPr>
             <a:xfrm>
-              <a:off x="2079186" y="2583293"/>
-              <a:ext cx="0" cy="3139848"/>
+              <a:off x="1035053" y="3210494"/>
+              <a:ext cx="7582157" cy="0"/>
             </a:xfrm>
             <a:custGeom>
               <a:avLst/>
               <a:pathLst>
-                <a:path w="0" h="3139848">
+                <a:path w="7582157" h="0">
                   <a:moveTo>
-                    <a:pt x="0" y="3139848"/>
+                    <a:pt x="0" y="0"/>
                   </a:moveTo>
                   <a:lnTo>
-                    <a:pt x="0" y="0"/>
-                  </a:lnTo>
-                  <a:lnTo>
-                    <a:pt x="0" y="0"/>
+                    <a:pt x="7582157" y="0"/>
+                  </a:lnTo>
+                  <a:lnTo>
+                    <a:pt x="7582157" y="0"/>
                   </a:lnTo>
                 </a:path>
               </a:pathLst>
@@ -2443,7 +2443,7 @@
           </p:nvSpPr>
           <p:spPr>
             <a:xfrm>
-              <a:off x="4076139" y="2583293"/>
+              <a:off x="2132366" y="2583293"/>
               <a:ext cx="0" cy="3139848"/>
             </a:xfrm>
             <a:custGeom>
@@ -2486,7 +2486,7 @@
           </p:nvSpPr>
           <p:spPr>
             <a:xfrm>
-              <a:off x="6073092" y="2583293"/>
+              <a:off x="4113076" y="2583293"/>
               <a:ext cx="0" cy="3139848"/>
             </a:xfrm>
             <a:custGeom>
@@ -2529,7 +2529,7 @@
           </p:nvSpPr>
           <p:spPr>
             <a:xfrm>
-              <a:off x="8070045" y="2583293"/>
+              <a:off x="6093786" y="2583293"/>
               <a:ext cx="0" cy="3139848"/>
             </a:xfrm>
             <a:custGeom>
@@ -2572,26 +2572,26 @@
           </p:nvSpPr>
           <p:spPr>
             <a:xfrm>
-              <a:off x="972874" y="5580422"/>
-              <a:ext cx="7644336" cy="0"/>
+              <a:off x="8074496" y="2583293"/>
+              <a:ext cx="0" cy="3139848"/>
             </a:xfrm>
             <a:custGeom>
               <a:avLst/>
               <a:pathLst>
-                <a:path w="7644336" h="0">
+                <a:path w="0" h="3139848">
                   <a:moveTo>
+                    <a:pt x="0" y="3139848"/>
+                  </a:moveTo>
+                  <a:lnTo>
                     <a:pt x="0" y="0"/>
-                  </a:moveTo>
-                  <a:lnTo>
-                    <a:pt x="7644336" y="0"/>
-                  </a:lnTo>
-                  <a:lnTo>
-                    <a:pt x="7644336" y="0"/>
+                  </a:lnTo>
+                  <a:lnTo>
+                    <a:pt x="0" y="0"/>
                   </a:lnTo>
                 </a:path>
               </a:pathLst>
             </a:custGeom>
-            <a:ln w="13550" cap="flat">
+            <a:ln w="6775" cap="flat">
               <a:solidFill>
                 <a:srgbClr val="EBEBEB">
                   <a:alpha val="100000"/>
@@ -2615,21 +2615,21 @@
           </p:nvSpPr>
           <p:spPr>
             <a:xfrm>
-              <a:off x="972874" y="4663543"/>
-              <a:ext cx="7644336" cy="0"/>
+              <a:off x="1035053" y="5580422"/>
+              <a:ext cx="7582157" cy="0"/>
             </a:xfrm>
             <a:custGeom>
               <a:avLst/>
               <a:pathLst>
-                <a:path w="7644336" h="0">
+                <a:path w="7582157" h="0">
                   <a:moveTo>
                     <a:pt x="0" y="0"/>
                   </a:moveTo>
                   <a:lnTo>
-                    <a:pt x="7644336" y="0"/>
-                  </a:lnTo>
-                  <a:lnTo>
-                    <a:pt x="7644336" y="0"/>
+                    <a:pt x="7582157" y="0"/>
+                  </a:lnTo>
+                  <a:lnTo>
+                    <a:pt x="7582157" y="0"/>
                   </a:lnTo>
                 </a:path>
               </a:pathLst>
@@ -2658,21 +2658,21 @@
           </p:nvSpPr>
           <p:spPr>
             <a:xfrm>
-              <a:off x="972874" y="3746665"/>
-              <a:ext cx="7644336" cy="0"/>
+              <a:off x="1035053" y="4903299"/>
+              <a:ext cx="7582157" cy="0"/>
             </a:xfrm>
             <a:custGeom>
               <a:avLst/>
               <a:pathLst>
-                <a:path w="7644336" h="0">
+                <a:path w="7582157" h="0">
                   <a:moveTo>
                     <a:pt x="0" y="0"/>
                   </a:moveTo>
                   <a:lnTo>
-                    <a:pt x="7644336" y="0"/>
-                  </a:lnTo>
-                  <a:lnTo>
-                    <a:pt x="7644336" y="0"/>
+                    <a:pt x="7582157" y="0"/>
+                  </a:lnTo>
+                  <a:lnTo>
+                    <a:pt x="7582157" y="0"/>
                   </a:lnTo>
                 </a:path>
               </a:pathLst>
@@ -2701,21 +2701,21 @@
           </p:nvSpPr>
           <p:spPr>
             <a:xfrm>
-              <a:off x="972874" y="2829787"/>
-              <a:ext cx="7644336" cy="0"/>
+              <a:off x="1035053" y="4226177"/>
+              <a:ext cx="7582157" cy="0"/>
             </a:xfrm>
             <a:custGeom>
               <a:avLst/>
               <a:pathLst>
-                <a:path w="7644336" h="0">
+                <a:path w="7582157" h="0">
                   <a:moveTo>
                     <a:pt x="0" y="0"/>
                   </a:moveTo>
                   <a:lnTo>
-                    <a:pt x="7644336" y="0"/>
-                  </a:lnTo>
-                  <a:lnTo>
-                    <a:pt x="7644336" y="0"/>
+                    <a:pt x="7582157" y="0"/>
+                  </a:lnTo>
+                  <a:lnTo>
+                    <a:pt x="7582157" y="0"/>
                   </a:lnTo>
                 </a:path>
               </a:pathLst>
@@ -2744,21 +2744,21 @@
           </p:nvSpPr>
           <p:spPr>
             <a:xfrm>
-              <a:off x="1080709" y="2583293"/>
-              <a:ext cx="0" cy="3139848"/>
+              <a:off x="1035053" y="3549055"/>
+              <a:ext cx="7582157" cy="0"/>
             </a:xfrm>
             <a:custGeom>
               <a:avLst/>
               <a:pathLst>
-                <a:path w="0" h="3139848">
+                <a:path w="7582157" h="0">
                   <a:moveTo>
-                    <a:pt x="0" y="3139848"/>
+                    <a:pt x="0" y="0"/>
                   </a:moveTo>
                   <a:lnTo>
-                    <a:pt x="0" y="0"/>
-                  </a:lnTo>
-                  <a:lnTo>
-                    <a:pt x="0" y="0"/>
+                    <a:pt x="7582157" y="0"/>
+                  </a:lnTo>
+                  <a:lnTo>
+                    <a:pt x="7582157" y="0"/>
                   </a:lnTo>
                 </a:path>
               </a:pathLst>
@@ -2787,21 +2787,21 @@
           </p:nvSpPr>
           <p:spPr>
             <a:xfrm>
-              <a:off x="3077663" y="2583293"/>
-              <a:ext cx="0" cy="3139848"/>
+              <a:off x="1035053" y="2871932"/>
+              <a:ext cx="7582157" cy="0"/>
             </a:xfrm>
             <a:custGeom>
               <a:avLst/>
               <a:pathLst>
-                <a:path w="0" h="3139848">
+                <a:path w="7582157" h="0">
                   <a:moveTo>
-                    <a:pt x="0" y="3139848"/>
+                    <a:pt x="0" y="0"/>
                   </a:moveTo>
                   <a:lnTo>
-                    <a:pt x="0" y="0"/>
-                  </a:lnTo>
-                  <a:lnTo>
-                    <a:pt x="0" y="0"/>
+                    <a:pt x="7582157" y="0"/>
+                  </a:lnTo>
+                  <a:lnTo>
+                    <a:pt x="7582157" y="0"/>
                   </a:lnTo>
                 </a:path>
               </a:pathLst>
@@ -2830,7 +2830,7 @@
           </p:nvSpPr>
           <p:spPr>
             <a:xfrm>
-              <a:off x="5074616" y="2583293"/>
+              <a:off x="1142011" y="2583293"/>
               <a:ext cx="0" cy="3139848"/>
             </a:xfrm>
             <a:custGeom>
@@ -2873,7 +2873,7 @@
           </p:nvSpPr>
           <p:spPr>
             <a:xfrm>
-              <a:off x="7071569" y="2583293"/>
+              <a:off x="3122721" y="2583293"/>
               <a:ext cx="0" cy="3139848"/>
             </a:xfrm>
             <a:custGeom>
@@ -2916,87 +2916,173 @@
           </p:nvSpPr>
           <p:spPr>
             <a:xfrm>
-              <a:off x="1320344" y="4248275"/>
-              <a:ext cx="6949396" cy="1204597"/>
+              <a:off x="5103431" y="2583293"/>
+              <a:ext cx="0" cy="3139848"/>
             </a:xfrm>
             <a:custGeom>
               <a:avLst/>
               <a:pathLst>
-                <a:path w="6949396" h="1204597">
+                <a:path w="0" h="3139848">
                   <a:moveTo>
-                    <a:pt x="0" y="1204597"/>
+                    <a:pt x="0" y="3139848"/>
                   </a:moveTo>
                   <a:lnTo>
-                    <a:pt x="718903" y="1204597"/>
-                  </a:lnTo>
-                  <a:lnTo>
-                    <a:pt x="718903" y="1204597"/>
-                  </a:lnTo>
-                  <a:lnTo>
-                    <a:pt x="958537" y="1204597"/>
-                  </a:lnTo>
-                  <a:lnTo>
-                    <a:pt x="958537" y="1076065"/>
-                  </a:lnTo>
-                  <a:lnTo>
-                    <a:pt x="1517684" y="1076065"/>
-                  </a:lnTo>
-                  <a:lnTo>
-                    <a:pt x="1517684" y="945535"/>
-                  </a:lnTo>
-                  <a:lnTo>
-                    <a:pt x="1757318" y="945535"/>
-                  </a:lnTo>
-                  <a:lnTo>
-                    <a:pt x="1757318" y="813624"/>
-                  </a:lnTo>
-                  <a:lnTo>
-                    <a:pt x="1996953" y="813624"/>
-                  </a:lnTo>
-                  <a:lnTo>
-                    <a:pt x="1996953" y="681828"/>
-                  </a:lnTo>
-                  <a:lnTo>
-                    <a:pt x="2076831" y="681828"/>
-                  </a:lnTo>
-                  <a:lnTo>
-                    <a:pt x="2076831" y="549134"/>
-                  </a:lnTo>
-                  <a:lnTo>
-                    <a:pt x="2156709" y="549134"/>
-                  </a:lnTo>
-                  <a:lnTo>
-                    <a:pt x="2156709" y="412353"/>
-                  </a:lnTo>
-                  <a:lnTo>
-                    <a:pt x="4153662" y="412353"/>
-                  </a:lnTo>
-                  <a:lnTo>
-                    <a:pt x="4153662" y="275474"/>
-                  </a:lnTo>
-                  <a:lnTo>
-                    <a:pt x="5990859" y="275474"/>
-                  </a:lnTo>
-                  <a:lnTo>
-                    <a:pt x="5990859" y="138883"/>
-                  </a:lnTo>
-                  <a:lnTo>
-                    <a:pt x="6230493" y="138883"/>
-                  </a:lnTo>
-                  <a:lnTo>
-                    <a:pt x="6230493" y="0"/>
-                  </a:lnTo>
-                  <a:lnTo>
-                    <a:pt x="6390249" y="0"/>
-                  </a:lnTo>
-                  <a:lnTo>
-                    <a:pt x="6390249" y="0"/>
-                  </a:lnTo>
-                  <a:lnTo>
-                    <a:pt x="6949396" y="0"/>
-                  </a:lnTo>
-                  <a:lnTo>
-                    <a:pt x="6949396" y="0"/>
+                    <a:pt x="0" y="0"/>
+                  </a:lnTo>
+                  <a:lnTo>
+                    <a:pt x="0" y="0"/>
+                  </a:lnTo>
+                </a:path>
+              </a:pathLst>
+            </a:custGeom>
+            <a:ln w="13550" cap="flat">
+              <a:solidFill>
+                <a:srgbClr val="EBEBEB">
+                  <a:alpha val="100000"/>
+                </a:srgbClr>
+              </a:solidFill>
+              <a:prstDash val="solid"/>
+              <a:round/>
+            </a:ln>
+          </p:spPr>
+          <p:txBody>
+            <a:bodyPr/>
+            <a:lstStyle/>
+            <a:p/>
+          </p:txBody>
+        </p:sp>
+        <p:sp>
+          <p:nvSpPr>
+            <p:cNvPr id="20" name="pl20"/>
+            <p:cNvSpPr/>
+            <p:nvPr/>
+          </p:nvSpPr>
+          <p:spPr>
+            <a:xfrm>
+              <a:off x="7084141" y="2583293"/>
+              <a:ext cx="0" cy="3139848"/>
+            </a:xfrm>
+            <a:custGeom>
+              <a:avLst/>
+              <a:pathLst>
+                <a:path w="0" h="3139848">
+                  <a:moveTo>
+                    <a:pt x="0" y="3139848"/>
+                  </a:moveTo>
+                  <a:lnTo>
+                    <a:pt x="0" y="0"/>
+                  </a:lnTo>
+                  <a:lnTo>
+                    <a:pt x="0" y="0"/>
+                  </a:lnTo>
+                </a:path>
+              </a:pathLst>
+            </a:custGeom>
+            <a:ln w="13550" cap="flat">
+              <a:solidFill>
+                <a:srgbClr val="EBEBEB">
+                  <a:alpha val="100000"/>
+                </a:srgbClr>
+              </a:solidFill>
+              <a:prstDash val="solid"/>
+              <a:round/>
+            </a:ln>
+          </p:spPr>
+          <p:txBody>
+            <a:bodyPr/>
+            <a:lstStyle/>
+            <a:p/>
+          </p:txBody>
+        </p:sp>
+        <p:sp>
+          <p:nvSpPr>
+            <p:cNvPr id="21" name="pl21"/>
+            <p:cNvSpPr/>
+            <p:nvPr/>
+          </p:nvSpPr>
+          <p:spPr>
+            <a:xfrm>
+              <a:off x="1379697" y="3930708"/>
+              <a:ext cx="6892870" cy="1489037"/>
+            </a:xfrm>
+            <a:custGeom>
+              <a:avLst/>
+              <a:pathLst>
+                <a:path w="6892870" h="1489037">
+                  <a:moveTo>
+                    <a:pt x="0" y="1489037"/>
+                  </a:moveTo>
+                  <a:lnTo>
+                    <a:pt x="713055" y="1489037"/>
+                  </a:lnTo>
+                  <a:lnTo>
+                    <a:pt x="713055" y="1489037"/>
+                  </a:lnTo>
+                  <a:lnTo>
+                    <a:pt x="950740" y="1489037"/>
+                  </a:lnTo>
+                  <a:lnTo>
+                    <a:pt x="950740" y="1330477"/>
+                  </a:lnTo>
+                  <a:lnTo>
+                    <a:pt x="1505339" y="1330477"/>
+                  </a:lnTo>
+                  <a:lnTo>
+                    <a:pt x="1505339" y="1168667"/>
+                  </a:lnTo>
+                  <a:lnTo>
+                    <a:pt x="1743024" y="1168667"/>
+                  </a:lnTo>
+                  <a:lnTo>
+                    <a:pt x="1743024" y="1003373"/>
+                  </a:lnTo>
+                  <a:lnTo>
+                    <a:pt x="1980709" y="1003373"/>
+                  </a:lnTo>
+                  <a:lnTo>
+                    <a:pt x="1980709" y="840307"/>
+                  </a:lnTo>
+                  <a:lnTo>
+                    <a:pt x="2059938" y="840307"/>
+                  </a:lnTo>
+                  <a:lnTo>
+                    <a:pt x="2059938" y="679581"/>
+                  </a:lnTo>
+                  <a:lnTo>
+                    <a:pt x="2139166" y="679581"/>
+                  </a:lnTo>
+                  <a:lnTo>
+                    <a:pt x="2139166" y="515254"/>
+                  </a:lnTo>
+                  <a:lnTo>
+                    <a:pt x="4119876" y="515254"/>
+                  </a:lnTo>
+                  <a:lnTo>
+                    <a:pt x="4119876" y="342908"/>
+                  </a:lnTo>
+                  <a:lnTo>
+                    <a:pt x="5942129" y="342908"/>
+                  </a:lnTo>
+                  <a:lnTo>
+                    <a:pt x="5942129" y="173672"/>
+                  </a:lnTo>
+                  <a:lnTo>
+                    <a:pt x="6179814" y="173672"/>
+                  </a:lnTo>
+                  <a:lnTo>
+                    <a:pt x="6179814" y="0"/>
+                  </a:lnTo>
+                  <a:lnTo>
+                    <a:pt x="6338271" y="0"/>
+                  </a:lnTo>
+                  <a:lnTo>
+                    <a:pt x="6338271" y="0"/>
+                  </a:lnTo>
+                  <a:lnTo>
+                    <a:pt x="6892870" y="0"/>
+                  </a:lnTo>
+                  <a:lnTo>
+                    <a:pt x="6892870" y="0"/>
                   </a:lnTo>
                 </a:path>
               </a:pathLst>
@@ -3019,93 +3105,93 @@
         </p:sp>
         <p:sp>
           <p:nvSpPr>
-            <p:cNvPr id="20" name="pl20"/>
+            <p:cNvPr id="22" name="pl22"/>
             <p:cNvSpPr/>
             <p:nvPr/>
           </p:nvSpPr>
           <p:spPr>
             <a:xfrm>
-              <a:off x="1320344" y="2861938"/>
-              <a:ext cx="6949396" cy="2445029"/>
+              <a:off x="1379697" y="2861938"/>
+              <a:ext cx="6892870" cy="2437033"/>
             </a:xfrm>
             <a:custGeom>
               <a:avLst/>
               <a:pathLst>
-                <a:path w="6949396" h="2445029">
+                <a:path w="6892870" h="2437033">
                   <a:moveTo>
-                    <a:pt x="0" y="2445029"/>
+                    <a:pt x="0" y="2437033"/>
                   </a:moveTo>
                   <a:lnTo>
-                    <a:pt x="718903" y="2445029"/>
-                  </a:lnTo>
-                  <a:lnTo>
-                    <a:pt x="718903" y="2445029"/>
-                  </a:lnTo>
-                  <a:lnTo>
-                    <a:pt x="958537" y="2445029"/>
-                  </a:lnTo>
-                  <a:lnTo>
-                    <a:pt x="958537" y="2172338"/>
-                  </a:lnTo>
-                  <a:lnTo>
-                    <a:pt x="1517684" y="2172338"/>
-                  </a:lnTo>
-                  <a:lnTo>
-                    <a:pt x="1517684" y="1898338"/>
-                  </a:lnTo>
-                  <a:lnTo>
-                    <a:pt x="1757318" y="1898338"/>
-                  </a:lnTo>
-                  <a:lnTo>
-                    <a:pt x="1757318" y="1624420"/>
-                  </a:lnTo>
-                  <a:lnTo>
-                    <a:pt x="1996953" y="1624420"/>
-                  </a:lnTo>
-                  <a:lnTo>
-                    <a:pt x="1996953" y="1353715"/>
-                  </a:lnTo>
-                  <a:lnTo>
-                    <a:pt x="2076831" y="1353715"/>
-                  </a:lnTo>
-                  <a:lnTo>
-                    <a:pt x="2076831" y="1084148"/>
-                  </a:lnTo>
-                  <a:lnTo>
-                    <a:pt x="2156709" y="1084148"/>
-                  </a:lnTo>
-                  <a:lnTo>
-                    <a:pt x="2156709" y="809392"/>
-                  </a:lnTo>
-                  <a:lnTo>
-                    <a:pt x="4153662" y="809392"/>
-                  </a:lnTo>
-                  <a:lnTo>
-                    <a:pt x="4153662" y="537582"/>
-                  </a:lnTo>
-                  <a:lnTo>
-                    <a:pt x="5990859" y="537582"/>
-                  </a:lnTo>
-                  <a:lnTo>
-                    <a:pt x="5990859" y="269458"/>
-                  </a:lnTo>
-                  <a:lnTo>
-                    <a:pt x="6230493" y="269458"/>
-                  </a:lnTo>
-                  <a:lnTo>
-                    <a:pt x="6230493" y="0"/>
-                  </a:lnTo>
-                  <a:lnTo>
-                    <a:pt x="6390249" y="0"/>
-                  </a:lnTo>
-                  <a:lnTo>
-                    <a:pt x="6390249" y="0"/>
-                  </a:lnTo>
-                  <a:lnTo>
-                    <a:pt x="6949396" y="0"/>
-                  </a:lnTo>
-                  <a:lnTo>
-                    <a:pt x="6949396" y="0"/>
+                    <a:pt x="713055" y="2437033"/>
+                  </a:lnTo>
+                  <a:lnTo>
+                    <a:pt x="713055" y="2437033"/>
+                  </a:lnTo>
+                  <a:lnTo>
+                    <a:pt x="950740" y="2437033"/>
+                  </a:lnTo>
+                  <a:lnTo>
+                    <a:pt x="950740" y="2163758"/>
+                  </a:lnTo>
+                  <a:lnTo>
+                    <a:pt x="1505339" y="2163758"/>
+                  </a:lnTo>
+                  <a:lnTo>
+                    <a:pt x="1505339" y="1889038"/>
+                  </a:lnTo>
+                  <a:lnTo>
+                    <a:pt x="1743024" y="1889038"/>
+                  </a:lnTo>
+                  <a:lnTo>
+                    <a:pt x="1743024" y="1612345"/>
+                  </a:lnTo>
+                  <a:lnTo>
+                    <a:pt x="1980709" y="1612345"/>
+                  </a:lnTo>
+                  <a:lnTo>
+                    <a:pt x="1980709" y="1342930"/>
+                  </a:lnTo>
+                  <a:lnTo>
+                    <a:pt x="2059938" y="1342930"/>
+                  </a:lnTo>
+                  <a:lnTo>
+                    <a:pt x="2059938" y="1080526"/>
+                  </a:lnTo>
+                  <a:lnTo>
+                    <a:pt x="2139166" y="1080526"/>
+                  </a:lnTo>
+                  <a:lnTo>
+                    <a:pt x="2139166" y="815192"/>
+                  </a:lnTo>
+                  <a:lnTo>
+                    <a:pt x="4119876" y="815192"/>
+                  </a:lnTo>
+                  <a:lnTo>
+                    <a:pt x="4119876" y="539843"/>
+                  </a:lnTo>
+                  <a:lnTo>
+                    <a:pt x="5942129" y="539843"/>
+                  </a:lnTo>
+                  <a:lnTo>
+                    <a:pt x="5942129" y="272151"/>
+                  </a:lnTo>
+                  <a:lnTo>
+                    <a:pt x="6179814" y="272151"/>
+                  </a:lnTo>
+                  <a:lnTo>
+                    <a:pt x="6179814" y="0"/>
+                  </a:lnTo>
+                  <a:lnTo>
+                    <a:pt x="6338271" y="0"/>
+                  </a:lnTo>
+                  <a:lnTo>
+                    <a:pt x="6338271" y="0"/>
+                  </a:lnTo>
+                  <a:lnTo>
+                    <a:pt x="6892870" y="0"/>
+                  </a:lnTo>
+                  <a:lnTo>
+                    <a:pt x="6892870" y="0"/>
                   </a:lnTo>
                 </a:path>
               </a:pathLst>
@@ -3128,14 +3214,14 @@
         </p:sp>
         <p:sp>
           <p:nvSpPr>
-            <p:cNvPr id="21" name="tx21"/>
+            <p:cNvPr id="23" name="tx23"/>
             <p:cNvSpPr/>
             <p:nvPr/>
           </p:nvSpPr>
           <p:spPr>
             <a:xfrm>
               <a:off x="692708" y="5540371"/>
-              <a:ext cx="217535" cy="80101"/>
+              <a:ext cx="279714" cy="80101"/>
             </a:xfrm>
             <a:prstGeom prst="rect">
               <a:avLst/>
@@ -3167,21 +3253,21 @@
                   <a:latin typeface="Helvetica"/>
                   <a:cs typeface="Helvetica"/>
                 </a:rPr>
-                <a:t>0.00</a:t>
+                <a:t>0.000</a:t>
               </a:r>
             </a:p>
           </p:txBody>
         </p:sp>
         <p:sp>
           <p:nvSpPr>
-            <p:cNvPr id="22" name="tx22"/>
+            <p:cNvPr id="24" name="tx24"/>
             <p:cNvSpPr/>
             <p:nvPr/>
           </p:nvSpPr>
           <p:spPr>
             <a:xfrm>
-              <a:off x="692708" y="4623493"/>
-              <a:ext cx="217535" cy="80101"/>
+              <a:off x="692708" y="4863249"/>
+              <a:ext cx="279714" cy="80101"/>
             </a:xfrm>
             <a:prstGeom prst="rect">
               <a:avLst/>
@@ -3213,21 +3299,21 @@
                   <a:latin typeface="Helvetica"/>
                   <a:cs typeface="Helvetica"/>
                 </a:rPr>
-                <a:t>0.04</a:t>
+                <a:t>0.025</a:t>
               </a:r>
             </a:p>
           </p:txBody>
         </p:sp>
         <p:sp>
           <p:nvSpPr>
-            <p:cNvPr id="23" name="tx23"/>
+            <p:cNvPr id="25" name="tx25"/>
             <p:cNvSpPr/>
             <p:nvPr/>
           </p:nvSpPr>
           <p:spPr>
             <a:xfrm>
-              <a:off x="692708" y="3706614"/>
-              <a:ext cx="217535" cy="80101"/>
+              <a:off x="692708" y="4186126"/>
+              <a:ext cx="279714" cy="80101"/>
             </a:xfrm>
             <a:prstGeom prst="rect">
               <a:avLst/>
@@ -3259,21 +3345,21 @@
                   <a:latin typeface="Helvetica"/>
                   <a:cs typeface="Helvetica"/>
                 </a:rPr>
-                <a:t>0.08</a:t>
+                <a:t>0.050</a:t>
               </a:r>
             </a:p>
           </p:txBody>
         </p:sp>
         <p:sp>
           <p:nvSpPr>
-            <p:cNvPr id="24" name="tx24"/>
+            <p:cNvPr id="26" name="tx26"/>
             <p:cNvSpPr/>
             <p:nvPr/>
           </p:nvSpPr>
           <p:spPr>
             <a:xfrm>
-              <a:off x="692708" y="2789736"/>
-              <a:ext cx="217535" cy="80101"/>
+              <a:off x="692708" y="3509004"/>
+              <a:ext cx="279714" cy="80101"/>
             </a:xfrm>
             <a:prstGeom prst="rect">
               <a:avLst/>
@@ -3305,20 +3391,66 @@
                   <a:latin typeface="Helvetica"/>
                   <a:cs typeface="Helvetica"/>
                 </a:rPr>
-                <a:t>0.12</a:t>
+                <a:t>0.075</a:t>
               </a:r>
             </a:p>
           </p:txBody>
         </p:sp>
         <p:sp>
           <p:nvSpPr>
-            <p:cNvPr id="25" name="tx25"/>
+            <p:cNvPr id="27" name="tx27"/>
             <p:cNvSpPr/>
             <p:nvPr/>
           </p:nvSpPr>
           <p:spPr>
             <a:xfrm>
-              <a:off x="1049620" y="5785772"/>
+              <a:off x="692708" y="2831882"/>
+              <a:ext cx="279714" cy="80101"/>
+            </a:xfrm>
+            <a:prstGeom prst="rect">
+              <a:avLst/>
+            </a:prstGeom>
+            <a:noFill/>
+          </p:spPr>
+          <p:txBody>
+            <a:bodyPr lIns="0" rIns="0" tIns="0" bIns="0" anchorCtr="1" anchor="ctr" wrap="none"/>
+            <a:lstStyle/>
+            <a:p>
+              <a:pPr algn="l" marL="0" marR="0" indent="0">
+                <a:lnSpc>
+                  <a:spcPts val="880"/>
+                </a:lnSpc>
+                <a:spcBef>
+                  <a:spcPts val="0"/>
+                </a:spcBef>
+                <a:spcAft>
+                  <a:spcPts val="0"/>
+                </a:spcAft>
+              </a:pPr>
+              <a:r>
+                <a:rPr sz="880">
+                  <a:solidFill>
+                    <a:srgbClr val="4D4D4D">
+                      <a:alpha val="100000"/>
+                    </a:srgbClr>
+                  </a:solidFill>
+                  <a:latin typeface="Helvetica"/>
+                  <a:cs typeface="Helvetica"/>
+                </a:rPr>
+                <a:t>0.100</a:t>
+              </a:r>
+            </a:p>
+          </p:txBody>
+        </p:sp>
+        <p:sp>
+          <p:nvSpPr>
+            <p:cNvPr id="28" name="tx28"/>
+            <p:cNvSpPr/>
+            <p:nvPr/>
+          </p:nvSpPr>
+          <p:spPr>
+            <a:xfrm>
+              <a:off x="1110922" y="5785772"/>
               <a:ext cx="62179" cy="80101"/>
             </a:xfrm>
             <a:prstGeom prst="rect">
@@ -3358,13 +3490,13 @@
         </p:sp>
         <p:sp>
           <p:nvSpPr>
-            <p:cNvPr id="26" name="tx26"/>
+            <p:cNvPr id="29" name="tx29"/>
             <p:cNvSpPr/>
             <p:nvPr/>
           </p:nvSpPr>
           <p:spPr>
             <a:xfrm>
-              <a:off x="3015483" y="5785772"/>
+              <a:off x="3060542" y="5785772"/>
               <a:ext cx="124358" cy="80101"/>
             </a:xfrm>
             <a:prstGeom prst="rect">
@@ -3404,13 +3536,13 @@
         </p:sp>
         <p:sp>
           <p:nvSpPr>
-            <p:cNvPr id="27" name="tx27"/>
+            <p:cNvPr id="30" name="tx30"/>
             <p:cNvSpPr/>
             <p:nvPr/>
           </p:nvSpPr>
           <p:spPr>
             <a:xfrm>
-              <a:off x="5012436" y="5785772"/>
+              <a:off x="5041252" y="5785772"/>
               <a:ext cx="124358" cy="80101"/>
             </a:xfrm>
             <a:prstGeom prst="rect">
@@ -3450,13 +3582,13 @@
         </p:sp>
         <p:sp>
           <p:nvSpPr>
-            <p:cNvPr id="28" name="tx28"/>
+            <p:cNvPr id="31" name="tx31"/>
             <p:cNvSpPr/>
             <p:nvPr/>
           </p:nvSpPr>
           <p:spPr>
             <a:xfrm>
-              <a:off x="7009390" y="5785772"/>
+              <a:off x="7021962" y="5785772"/>
               <a:ext cx="124358" cy="80101"/>
             </a:xfrm>
             <a:prstGeom prst="rect">
@@ -3496,13 +3628,13 @@
         </p:sp>
         <p:sp>
           <p:nvSpPr>
-            <p:cNvPr id="29" name="tx29"/>
+            <p:cNvPr id="32" name="tx32"/>
             <p:cNvSpPr/>
             <p:nvPr/>
           </p:nvSpPr>
           <p:spPr>
             <a:xfrm>
-              <a:off x="4197162" y="5925448"/>
+              <a:off x="4228251" y="5925448"/>
               <a:ext cx="1195760" cy="100218"/>
             </a:xfrm>
             <a:prstGeom prst="rect">
@@ -3542,7 +3674,7 @@
         </p:sp>
         <p:sp>
           <p:nvSpPr>
-            <p:cNvPr id="30" name="tx30"/>
+            <p:cNvPr id="33" name="tx33"/>
             <p:cNvSpPr/>
             <p:nvPr/>
           </p:nvSpPr>
@@ -3588,13 +3720,13 @@
         </p:sp>
         <p:sp>
           <p:nvSpPr>
-            <p:cNvPr id="31" name="pl31"/>
+            <p:cNvPr id="34" name="pl34"/>
             <p:cNvSpPr/>
             <p:nvPr/>
           </p:nvSpPr>
           <p:spPr>
             <a:xfrm>
-              <a:off x="3578565" y="2264798"/>
+              <a:off x="3609655" y="2264798"/>
               <a:ext cx="175564" cy="0"/>
             </a:xfrm>
             <a:custGeom>
@@ -3628,13 +3760,13 @@
         </p:sp>
         <p:sp>
           <p:nvSpPr>
-            <p:cNvPr id="32" name="pl32"/>
+            <p:cNvPr id="35" name="pl35"/>
             <p:cNvSpPr/>
             <p:nvPr/>
           </p:nvSpPr>
           <p:spPr>
             <a:xfrm>
-              <a:off x="4819138" y="2264798"/>
+              <a:off x="4850228" y="2264798"/>
               <a:ext cx="175564" cy="0"/>
             </a:xfrm>
             <a:custGeom>
@@ -3668,13 +3800,13 @@
         </p:sp>
         <p:sp>
           <p:nvSpPr>
-            <p:cNvPr id="33" name="tx33"/>
+            <p:cNvPr id="36" name="tx36"/>
             <p:cNvSpPr/>
             <p:nvPr/>
           </p:nvSpPr>
           <p:spPr>
             <a:xfrm>
-              <a:off x="3845665" y="2224748"/>
+              <a:off x="3876754" y="2224748"/>
               <a:ext cx="881938" cy="80101"/>
             </a:xfrm>
             <a:prstGeom prst="rect">
@@ -3714,13 +3846,13 @@
         </p:sp>
         <p:sp>
           <p:nvSpPr>
-            <p:cNvPr id="34" name="tx34"/>
+            <p:cNvPr id="37" name="tx37"/>
             <p:cNvSpPr/>
             <p:nvPr/>
           </p:nvSpPr>
           <p:spPr>
             <a:xfrm>
-              <a:off x="5086238" y="2224748"/>
+              <a:off x="5117327" y="2224748"/>
               <a:ext cx="947226" cy="80101"/>
             </a:xfrm>
             <a:prstGeom prst="rect">
@@ -3760,13 +3892,13 @@
         </p:sp>
         <p:sp>
           <p:nvSpPr>
-            <p:cNvPr id="35" name="tx35"/>
+            <p:cNvPr id="38" name="tx38"/>
             <p:cNvSpPr/>
             <p:nvPr/>
           </p:nvSpPr>
           <p:spPr>
             <a:xfrm>
-              <a:off x="972874" y="1896563"/>
+              <a:off x="1035053" y="1896563"/>
               <a:ext cx="4337273" cy="91165"/>
             </a:xfrm>
             <a:prstGeom prst="rect">
@@ -3799,20 +3931,20 @@
                   <a:latin typeface="Helvetica"/>
                   <a:cs typeface="Helvetica"/>
                 </a:rPr>
-                <a:t>Discrep &gt;= +25 vs &lt;+25: HR = 2.16 (95% CI 0.58-7.96), p = 0.249   (Cox PH)</a:t>
+                <a:t>Discrep &gt;= +25 vs &lt;+25: HR = 1.77 (95% CI 0.44-7.17), p = 0.426   (Cox PH)</a:t>
               </a:r>
             </a:p>
           </p:txBody>
         </p:sp>
         <p:sp>
           <p:nvSpPr>
-            <p:cNvPr id="36" name="tx36"/>
+            <p:cNvPr id="39" name="tx39"/>
             <p:cNvSpPr/>
             <p:nvPr/>
           </p:nvSpPr>
           <p:spPr>
             <a:xfrm>
-              <a:off x="972874" y="1669789"/>
+              <a:off x="1035053" y="1669789"/>
               <a:ext cx="1033637" cy="120152"/>
             </a:xfrm>
             <a:prstGeom prst="rect">

--- a/docs/plots/carbo/jx_carbo_adjcif_death.pptx
+++ b/docs/plots/carbo/jx_carbo_adjcif_death.pptx
@@ -2271,26 +2271,26 @@
           </p:nvSpPr>
           <p:spPr>
             <a:xfrm>
-              <a:off x="1035053" y="5241861"/>
-              <a:ext cx="7582157" cy="0"/>
+              <a:off x="1192159" y="5179460"/>
+              <a:ext cx="7406072" cy="0"/>
             </a:xfrm>
             <a:custGeom>
               <a:avLst/>
               <a:pathLst>
-                <a:path w="7582157" h="0">
+                <a:path w="7406072" h="0">
                   <a:moveTo>
                     <a:pt x="0" y="0"/>
                   </a:moveTo>
                   <a:lnTo>
-                    <a:pt x="7582157" y="0"/>
-                  </a:lnTo>
-                  <a:lnTo>
-                    <a:pt x="7582157" y="0"/>
+                    <a:pt x="7406072" y="0"/>
+                  </a:lnTo>
+                  <a:lnTo>
+                    <a:pt x="7406072" y="0"/>
                   </a:lnTo>
                 </a:path>
               </a:pathLst>
             </a:custGeom>
-            <a:ln w="6775" cap="flat">
+            <a:ln w="8623" cap="flat">
               <a:solidFill>
                 <a:srgbClr val="EBEBEB">
                   <a:alpha val="100000"/>
@@ -2314,26 +2314,26 @@
           </p:nvSpPr>
           <p:spPr>
             <a:xfrm>
-              <a:off x="1035053" y="4564738"/>
-              <a:ext cx="7582157" cy="0"/>
+              <a:off x="1192159" y="4569068"/>
+              <a:ext cx="7406072" cy="0"/>
             </a:xfrm>
             <a:custGeom>
               <a:avLst/>
               <a:pathLst>
-                <a:path w="7582157" h="0">
+                <a:path w="7406072" h="0">
                   <a:moveTo>
                     <a:pt x="0" y="0"/>
                   </a:moveTo>
                   <a:lnTo>
-                    <a:pt x="7582157" y="0"/>
-                  </a:lnTo>
-                  <a:lnTo>
-                    <a:pt x="7582157" y="0"/>
+                    <a:pt x="7406072" y="0"/>
+                  </a:lnTo>
+                  <a:lnTo>
+                    <a:pt x="7406072" y="0"/>
                   </a:lnTo>
                 </a:path>
               </a:pathLst>
             </a:custGeom>
-            <a:ln w="6775" cap="flat">
+            <a:ln w="8623" cap="flat">
               <a:solidFill>
                 <a:srgbClr val="EBEBEB">
                   <a:alpha val="100000"/>
@@ -2357,26 +2357,26 @@
           </p:nvSpPr>
           <p:spPr>
             <a:xfrm>
-              <a:off x="1035053" y="3887616"/>
-              <a:ext cx="7582157" cy="0"/>
+              <a:off x="1192159" y="3958677"/>
+              <a:ext cx="7406072" cy="0"/>
             </a:xfrm>
             <a:custGeom>
               <a:avLst/>
               <a:pathLst>
-                <a:path w="7582157" h="0">
+                <a:path w="7406072" h="0">
                   <a:moveTo>
                     <a:pt x="0" y="0"/>
                   </a:moveTo>
                   <a:lnTo>
-                    <a:pt x="7582157" y="0"/>
-                  </a:lnTo>
-                  <a:lnTo>
-                    <a:pt x="7582157" y="0"/>
+                    <a:pt x="7406072" y="0"/>
+                  </a:lnTo>
+                  <a:lnTo>
+                    <a:pt x="7406072" y="0"/>
                   </a:lnTo>
                 </a:path>
               </a:pathLst>
             </a:custGeom>
-            <a:ln w="6775" cap="flat">
+            <a:ln w="8623" cap="flat">
               <a:solidFill>
                 <a:srgbClr val="EBEBEB">
                   <a:alpha val="100000"/>
@@ -2400,26 +2400,26 @@
           </p:nvSpPr>
           <p:spPr>
             <a:xfrm>
-              <a:off x="1035053" y="3210494"/>
-              <a:ext cx="7582157" cy="0"/>
+              <a:off x="1192159" y="3348285"/>
+              <a:ext cx="7406072" cy="0"/>
             </a:xfrm>
             <a:custGeom>
               <a:avLst/>
               <a:pathLst>
-                <a:path w="7582157" h="0">
+                <a:path w="7406072" h="0">
                   <a:moveTo>
                     <a:pt x="0" y="0"/>
                   </a:moveTo>
                   <a:lnTo>
-                    <a:pt x="7582157" y="0"/>
-                  </a:lnTo>
-                  <a:lnTo>
-                    <a:pt x="7582157" y="0"/>
+                    <a:pt x="7406072" y="0"/>
+                  </a:lnTo>
+                  <a:lnTo>
+                    <a:pt x="7406072" y="0"/>
                   </a:lnTo>
                 </a:path>
               </a:pathLst>
             </a:custGeom>
-            <a:ln w="6775" cap="flat">
+            <a:ln w="8623" cap="flat">
               <a:solidFill>
                 <a:srgbClr val="EBEBEB">
                   <a:alpha val="100000"/>
@@ -2443,15 +2443,15 @@
           </p:nvSpPr>
           <p:spPr>
             <a:xfrm>
-              <a:off x="2132366" y="2583293"/>
-              <a:ext cx="0" cy="3139848"/>
+              <a:off x="2263989" y="2782896"/>
+              <a:ext cx="0" cy="2830414"/>
             </a:xfrm>
             <a:custGeom>
               <a:avLst/>
               <a:pathLst>
-                <a:path w="0" h="3139848">
+                <a:path w="0" h="2830414">
                   <a:moveTo>
-                    <a:pt x="0" y="3139848"/>
+                    <a:pt x="0" y="2830414"/>
                   </a:moveTo>
                   <a:lnTo>
                     <a:pt x="0" y="0"/>
@@ -2462,7 +2462,7 @@
                 </a:path>
               </a:pathLst>
             </a:custGeom>
-            <a:ln w="6775" cap="flat">
+            <a:ln w="8623" cap="flat">
               <a:solidFill>
                 <a:srgbClr val="EBEBEB">
                   <a:alpha val="100000"/>
@@ -2486,15 +2486,15 @@
           </p:nvSpPr>
           <p:spPr>
             <a:xfrm>
-              <a:off x="4113076" y="2583293"/>
-              <a:ext cx="0" cy="3139848"/>
+              <a:off x="4198700" y="2782896"/>
+              <a:ext cx="0" cy="2830414"/>
             </a:xfrm>
             <a:custGeom>
               <a:avLst/>
               <a:pathLst>
-                <a:path w="0" h="3139848">
+                <a:path w="0" h="2830414">
                   <a:moveTo>
-                    <a:pt x="0" y="3139848"/>
+                    <a:pt x="0" y="2830414"/>
                   </a:moveTo>
                   <a:lnTo>
                     <a:pt x="0" y="0"/>
@@ -2505,7 +2505,7 @@
                 </a:path>
               </a:pathLst>
             </a:custGeom>
-            <a:ln w="6775" cap="flat">
+            <a:ln w="8623" cap="flat">
               <a:solidFill>
                 <a:srgbClr val="EBEBEB">
                   <a:alpha val="100000"/>
@@ -2529,15 +2529,15 @@
           </p:nvSpPr>
           <p:spPr>
             <a:xfrm>
-              <a:off x="6093786" y="2583293"/>
-              <a:ext cx="0" cy="3139848"/>
+              <a:off x="6133410" y="2782896"/>
+              <a:ext cx="0" cy="2830414"/>
             </a:xfrm>
             <a:custGeom>
               <a:avLst/>
               <a:pathLst>
-                <a:path w="0" h="3139848">
+                <a:path w="0" h="2830414">
                   <a:moveTo>
-                    <a:pt x="0" y="3139848"/>
+                    <a:pt x="0" y="2830414"/>
                   </a:moveTo>
                   <a:lnTo>
                     <a:pt x="0" y="0"/>
@@ -2548,7 +2548,7 @@
                 </a:path>
               </a:pathLst>
             </a:custGeom>
-            <a:ln w="6775" cap="flat">
+            <a:ln w="8623" cap="flat">
               <a:solidFill>
                 <a:srgbClr val="EBEBEB">
                   <a:alpha val="100000"/>
@@ -2572,15 +2572,15 @@
           </p:nvSpPr>
           <p:spPr>
             <a:xfrm>
-              <a:off x="8074496" y="2583293"/>
-              <a:ext cx="0" cy="3139848"/>
+              <a:off x="8068121" y="2782896"/>
+              <a:ext cx="0" cy="2830414"/>
             </a:xfrm>
             <a:custGeom>
               <a:avLst/>
               <a:pathLst>
-                <a:path w="0" h="3139848">
+                <a:path w="0" h="2830414">
                   <a:moveTo>
-                    <a:pt x="0" y="3139848"/>
+                    <a:pt x="0" y="2830414"/>
                   </a:moveTo>
                   <a:lnTo>
                     <a:pt x="0" y="0"/>
@@ -2591,7 +2591,7 @@
                 </a:path>
               </a:pathLst>
             </a:custGeom>
-            <a:ln w="6775" cap="flat">
+            <a:ln w="8623" cap="flat">
               <a:solidFill>
                 <a:srgbClr val="EBEBEB">
                   <a:alpha val="100000"/>
@@ -2615,26 +2615,26 @@
           </p:nvSpPr>
           <p:spPr>
             <a:xfrm>
-              <a:off x="1035053" y="5580422"/>
-              <a:ext cx="7582157" cy="0"/>
+              <a:off x="1192159" y="5484655"/>
+              <a:ext cx="7406072" cy="0"/>
             </a:xfrm>
             <a:custGeom>
               <a:avLst/>
               <a:pathLst>
-                <a:path w="7582157" h="0">
+                <a:path w="7406072" h="0">
                   <a:moveTo>
                     <a:pt x="0" y="0"/>
                   </a:moveTo>
                   <a:lnTo>
-                    <a:pt x="7582157" y="0"/>
-                  </a:lnTo>
-                  <a:lnTo>
-                    <a:pt x="7582157" y="0"/>
+                    <a:pt x="7406072" y="0"/>
+                  </a:lnTo>
+                  <a:lnTo>
+                    <a:pt x="7406072" y="0"/>
                   </a:lnTo>
                 </a:path>
               </a:pathLst>
             </a:custGeom>
-            <a:ln w="13550" cap="flat">
+            <a:ln w="17246" cap="flat">
               <a:solidFill>
                 <a:srgbClr val="EBEBEB">
                   <a:alpha val="100000"/>
@@ -2658,26 +2658,26 @@
           </p:nvSpPr>
           <p:spPr>
             <a:xfrm>
-              <a:off x="1035053" y="4903299"/>
-              <a:ext cx="7582157" cy="0"/>
+              <a:off x="1192159" y="4874264"/>
+              <a:ext cx="7406072" cy="0"/>
             </a:xfrm>
             <a:custGeom>
               <a:avLst/>
               <a:pathLst>
-                <a:path w="7582157" h="0">
+                <a:path w="7406072" h="0">
                   <a:moveTo>
                     <a:pt x="0" y="0"/>
                   </a:moveTo>
                   <a:lnTo>
-                    <a:pt x="7582157" y="0"/>
-                  </a:lnTo>
-                  <a:lnTo>
-                    <a:pt x="7582157" y="0"/>
+                    <a:pt x="7406072" y="0"/>
+                  </a:lnTo>
+                  <a:lnTo>
+                    <a:pt x="7406072" y="0"/>
                   </a:lnTo>
                 </a:path>
               </a:pathLst>
             </a:custGeom>
-            <a:ln w="13550" cap="flat">
+            <a:ln w="17246" cap="flat">
               <a:solidFill>
                 <a:srgbClr val="EBEBEB">
                   <a:alpha val="100000"/>
@@ -2701,26 +2701,26 @@
           </p:nvSpPr>
           <p:spPr>
             <a:xfrm>
-              <a:off x="1035053" y="4226177"/>
-              <a:ext cx="7582157" cy="0"/>
+              <a:off x="1192159" y="4263873"/>
+              <a:ext cx="7406072" cy="0"/>
             </a:xfrm>
             <a:custGeom>
               <a:avLst/>
               <a:pathLst>
-                <a:path w="7582157" h="0">
+                <a:path w="7406072" h="0">
                   <a:moveTo>
                     <a:pt x="0" y="0"/>
                   </a:moveTo>
                   <a:lnTo>
-                    <a:pt x="7582157" y="0"/>
-                  </a:lnTo>
-                  <a:lnTo>
-                    <a:pt x="7582157" y="0"/>
+                    <a:pt x="7406072" y="0"/>
+                  </a:lnTo>
+                  <a:lnTo>
+                    <a:pt x="7406072" y="0"/>
                   </a:lnTo>
                 </a:path>
               </a:pathLst>
             </a:custGeom>
-            <a:ln w="13550" cap="flat">
+            <a:ln w="17246" cap="flat">
               <a:solidFill>
                 <a:srgbClr val="EBEBEB">
                   <a:alpha val="100000"/>
@@ -2744,26 +2744,26 @@
           </p:nvSpPr>
           <p:spPr>
             <a:xfrm>
-              <a:off x="1035053" y="3549055"/>
-              <a:ext cx="7582157" cy="0"/>
+              <a:off x="1192159" y="3653481"/>
+              <a:ext cx="7406072" cy="0"/>
             </a:xfrm>
             <a:custGeom>
               <a:avLst/>
               <a:pathLst>
-                <a:path w="7582157" h="0">
+                <a:path w="7406072" h="0">
                   <a:moveTo>
                     <a:pt x="0" y="0"/>
                   </a:moveTo>
                   <a:lnTo>
-                    <a:pt x="7582157" y="0"/>
-                  </a:lnTo>
-                  <a:lnTo>
-                    <a:pt x="7582157" y="0"/>
+                    <a:pt x="7406072" y="0"/>
+                  </a:lnTo>
+                  <a:lnTo>
+                    <a:pt x="7406072" y="0"/>
                   </a:lnTo>
                 </a:path>
               </a:pathLst>
             </a:custGeom>
-            <a:ln w="13550" cap="flat">
+            <a:ln w="17246" cap="flat">
               <a:solidFill>
                 <a:srgbClr val="EBEBEB">
                   <a:alpha val="100000"/>
@@ -2787,26 +2787,26 @@
           </p:nvSpPr>
           <p:spPr>
             <a:xfrm>
-              <a:off x="1035053" y="2871932"/>
-              <a:ext cx="7582157" cy="0"/>
+              <a:off x="1192159" y="3043090"/>
+              <a:ext cx="7406072" cy="0"/>
             </a:xfrm>
             <a:custGeom>
               <a:avLst/>
               <a:pathLst>
-                <a:path w="7582157" h="0">
+                <a:path w="7406072" h="0">
                   <a:moveTo>
                     <a:pt x="0" y="0"/>
                   </a:moveTo>
                   <a:lnTo>
-                    <a:pt x="7582157" y="0"/>
-                  </a:lnTo>
-                  <a:lnTo>
-                    <a:pt x="7582157" y="0"/>
+                    <a:pt x="7406072" y="0"/>
+                  </a:lnTo>
+                  <a:lnTo>
+                    <a:pt x="7406072" y="0"/>
                   </a:lnTo>
                 </a:path>
               </a:pathLst>
             </a:custGeom>
-            <a:ln w="13550" cap="flat">
+            <a:ln w="17246" cap="flat">
               <a:solidFill>
                 <a:srgbClr val="EBEBEB">
                   <a:alpha val="100000"/>
@@ -2830,15 +2830,15 @@
           </p:nvSpPr>
           <p:spPr>
             <a:xfrm>
-              <a:off x="1142011" y="2583293"/>
-              <a:ext cx="0" cy="3139848"/>
+              <a:off x="1296633" y="2782896"/>
+              <a:ext cx="0" cy="2830414"/>
             </a:xfrm>
             <a:custGeom>
               <a:avLst/>
               <a:pathLst>
-                <a:path w="0" h="3139848">
+                <a:path w="0" h="2830414">
                   <a:moveTo>
-                    <a:pt x="0" y="3139848"/>
+                    <a:pt x="0" y="2830414"/>
                   </a:moveTo>
                   <a:lnTo>
                     <a:pt x="0" y="0"/>
@@ -2849,7 +2849,7 @@
                 </a:path>
               </a:pathLst>
             </a:custGeom>
-            <a:ln w="13550" cap="flat">
+            <a:ln w="17246" cap="flat">
               <a:solidFill>
                 <a:srgbClr val="EBEBEB">
                   <a:alpha val="100000"/>
@@ -2873,15 +2873,15 @@
           </p:nvSpPr>
           <p:spPr>
             <a:xfrm>
-              <a:off x="3122721" y="2583293"/>
-              <a:ext cx="0" cy="3139848"/>
+              <a:off x="3231344" y="2782896"/>
+              <a:ext cx="0" cy="2830414"/>
             </a:xfrm>
             <a:custGeom>
               <a:avLst/>
               <a:pathLst>
-                <a:path w="0" h="3139848">
+                <a:path w="0" h="2830414">
                   <a:moveTo>
-                    <a:pt x="0" y="3139848"/>
+                    <a:pt x="0" y="2830414"/>
                   </a:moveTo>
                   <a:lnTo>
                     <a:pt x="0" y="0"/>
@@ -2892,7 +2892,7 @@
                 </a:path>
               </a:pathLst>
             </a:custGeom>
-            <a:ln w="13550" cap="flat">
+            <a:ln w="17246" cap="flat">
               <a:solidFill>
                 <a:srgbClr val="EBEBEB">
                   <a:alpha val="100000"/>
@@ -2916,15 +2916,15 @@
           </p:nvSpPr>
           <p:spPr>
             <a:xfrm>
-              <a:off x="5103431" y="2583293"/>
-              <a:ext cx="0" cy="3139848"/>
+              <a:off x="5166055" y="2782896"/>
+              <a:ext cx="0" cy="2830414"/>
             </a:xfrm>
             <a:custGeom>
               <a:avLst/>
               <a:pathLst>
-                <a:path w="0" h="3139848">
+                <a:path w="0" h="2830414">
                   <a:moveTo>
-                    <a:pt x="0" y="3139848"/>
+                    <a:pt x="0" y="2830414"/>
                   </a:moveTo>
                   <a:lnTo>
                     <a:pt x="0" y="0"/>
@@ -2935,7 +2935,7 @@
                 </a:path>
               </a:pathLst>
             </a:custGeom>
-            <a:ln w="13550" cap="flat">
+            <a:ln w="17246" cap="flat">
               <a:solidFill>
                 <a:srgbClr val="EBEBEB">
                   <a:alpha val="100000"/>
@@ -2959,15 +2959,15 @@
           </p:nvSpPr>
           <p:spPr>
             <a:xfrm>
-              <a:off x="7084141" y="2583293"/>
-              <a:ext cx="0" cy="3139848"/>
+              <a:off x="7100766" y="2782896"/>
+              <a:ext cx="0" cy="2830414"/>
             </a:xfrm>
             <a:custGeom>
               <a:avLst/>
               <a:pathLst>
-                <a:path w="0" h="3139848">
+                <a:path w="0" h="2830414">
                   <a:moveTo>
-                    <a:pt x="0" y="3139848"/>
+                    <a:pt x="0" y="2830414"/>
                   </a:moveTo>
                   <a:lnTo>
                     <a:pt x="0" y="0"/>
@@ -2978,7 +2978,7 @@
                 </a:path>
               </a:pathLst>
             </a:custGeom>
-            <a:ln w="13550" cap="flat">
+            <a:ln w="17246" cap="flat">
               <a:solidFill>
                 <a:srgbClr val="EBEBEB">
                   <a:alpha val="100000"/>
@@ -3002,87 +3002,87 @@
           </p:nvSpPr>
           <p:spPr>
             <a:xfrm>
-              <a:off x="1379697" y="3930708"/>
-              <a:ext cx="6892870" cy="1489037"/>
+              <a:off x="1528799" y="3997522"/>
+              <a:ext cx="6732793" cy="1342291"/>
             </a:xfrm>
             <a:custGeom>
               <a:avLst/>
               <a:pathLst>
-                <a:path w="6892870" h="1489037">
+                <a:path w="6732793" h="1342291">
                   <a:moveTo>
-                    <a:pt x="0" y="1489037"/>
+                    <a:pt x="0" y="1342291"/>
                   </a:moveTo>
                   <a:lnTo>
-                    <a:pt x="713055" y="1489037"/>
-                  </a:lnTo>
-                  <a:lnTo>
-                    <a:pt x="713055" y="1489037"/>
-                  </a:lnTo>
-                  <a:lnTo>
-                    <a:pt x="950740" y="1489037"/>
-                  </a:lnTo>
-                  <a:lnTo>
-                    <a:pt x="950740" y="1330477"/>
-                  </a:lnTo>
-                  <a:lnTo>
-                    <a:pt x="1505339" y="1330477"/>
-                  </a:lnTo>
-                  <a:lnTo>
-                    <a:pt x="1505339" y="1168667"/>
-                  </a:lnTo>
-                  <a:lnTo>
-                    <a:pt x="1743024" y="1168667"/>
-                  </a:lnTo>
-                  <a:lnTo>
-                    <a:pt x="1743024" y="1003373"/>
-                  </a:lnTo>
-                  <a:lnTo>
-                    <a:pt x="1980709" y="1003373"/>
-                  </a:lnTo>
-                  <a:lnTo>
-                    <a:pt x="1980709" y="840307"/>
-                  </a:lnTo>
-                  <a:lnTo>
-                    <a:pt x="2059938" y="840307"/>
-                  </a:lnTo>
-                  <a:lnTo>
-                    <a:pt x="2059938" y="679581"/>
-                  </a:lnTo>
-                  <a:lnTo>
-                    <a:pt x="2139166" y="679581"/>
-                  </a:lnTo>
-                  <a:lnTo>
-                    <a:pt x="2139166" y="515254"/>
-                  </a:lnTo>
-                  <a:lnTo>
-                    <a:pt x="4119876" y="515254"/>
-                  </a:lnTo>
-                  <a:lnTo>
-                    <a:pt x="4119876" y="342908"/>
-                  </a:lnTo>
-                  <a:lnTo>
-                    <a:pt x="5942129" y="342908"/>
-                  </a:lnTo>
-                  <a:lnTo>
-                    <a:pt x="5942129" y="173672"/>
-                  </a:lnTo>
-                  <a:lnTo>
-                    <a:pt x="6179814" y="173672"/>
-                  </a:lnTo>
-                  <a:lnTo>
-                    <a:pt x="6179814" y="0"/>
-                  </a:lnTo>
-                  <a:lnTo>
-                    <a:pt x="6338271" y="0"/>
-                  </a:lnTo>
-                  <a:lnTo>
-                    <a:pt x="6338271" y="0"/>
-                  </a:lnTo>
-                  <a:lnTo>
-                    <a:pt x="6892870" y="0"/>
-                  </a:lnTo>
-                  <a:lnTo>
-                    <a:pt x="6892870" y="0"/>
+                    <a:pt x="696495" y="1342291"/>
+                  </a:lnTo>
+                  <a:lnTo>
+                    <a:pt x="696495" y="1342291"/>
+                  </a:lnTo>
+                  <a:lnTo>
+                    <a:pt x="928661" y="1342291"/>
+                  </a:lnTo>
+                  <a:lnTo>
+                    <a:pt x="928661" y="1199358"/>
+                  </a:lnTo>
+                  <a:lnTo>
+                    <a:pt x="1470380" y="1199358"/>
+                  </a:lnTo>
+                  <a:lnTo>
+                    <a:pt x="1470380" y="1053494"/>
+                  </a:lnTo>
+                  <a:lnTo>
+                    <a:pt x="1702545" y="1053494"/>
+                  </a:lnTo>
+                  <a:lnTo>
+                    <a:pt x="1702545" y="904489"/>
+                  </a:lnTo>
+                  <a:lnTo>
+                    <a:pt x="1934710" y="904489"/>
+                  </a:lnTo>
+                  <a:lnTo>
+                    <a:pt x="1934710" y="757494"/>
+                  </a:lnTo>
+                  <a:lnTo>
+                    <a:pt x="2012099" y="757494"/>
+                  </a:lnTo>
+                  <a:lnTo>
+                    <a:pt x="2012099" y="612608"/>
+                  </a:lnTo>
+                  <a:lnTo>
+                    <a:pt x="2089487" y="612608"/>
+                  </a:lnTo>
+                  <a:lnTo>
+                    <a:pt x="2089487" y="464476"/>
+                  </a:lnTo>
+                  <a:lnTo>
+                    <a:pt x="4024198" y="464476"/>
+                  </a:lnTo>
+                  <a:lnTo>
+                    <a:pt x="4024198" y="309114"/>
+                  </a:lnTo>
+                  <a:lnTo>
+                    <a:pt x="5804132" y="309114"/>
+                  </a:lnTo>
+                  <a:lnTo>
+                    <a:pt x="5804132" y="156556"/>
+                  </a:lnTo>
+                  <a:lnTo>
+                    <a:pt x="6036297" y="156556"/>
+                  </a:lnTo>
+                  <a:lnTo>
+                    <a:pt x="6036297" y="0"/>
+                  </a:lnTo>
+                  <a:lnTo>
+                    <a:pt x="6191074" y="0"/>
+                  </a:lnTo>
+                  <a:lnTo>
+                    <a:pt x="6191074" y="0"/>
+                  </a:lnTo>
+                  <a:lnTo>
+                    <a:pt x="6732793" y="0"/>
+                  </a:lnTo>
+                  <a:lnTo>
+                    <a:pt x="6732793" y="0"/>
                   </a:lnTo>
                 </a:path>
               </a:pathLst>
@@ -3111,87 +3111,87 @@
           </p:nvSpPr>
           <p:spPr>
             <a:xfrm>
-              <a:off x="1379697" y="2861938"/>
-              <a:ext cx="6892870" cy="2437033"/>
+              <a:off x="1528799" y="3034080"/>
+              <a:ext cx="6732793" cy="2196861"/>
             </a:xfrm>
             <a:custGeom>
               <a:avLst/>
               <a:pathLst>
-                <a:path w="6892870" h="2437033">
+                <a:path w="6732793" h="2196861">
                   <a:moveTo>
-                    <a:pt x="0" y="2437033"/>
+                    <a:pt x="0" y="2196861"/>
                   </a:moveTo>
                   <a:lnTo>
-                    <a:pt x="713055" y="2437033"/>
-                  </a:lnTo>
-                  <a:lnTo>
-                    <a:pt x="713055" y="2437033"/>
-                  </a:lnTo>
-                  <a:lnTo>
-                    <a:pt x="950740" y="2437033"/>
-                  </a:lnTo>
-                  <a:lnTo>
-                    <a:pt x="950740" y="2163758"/>
-                  </a:lnTo>
-                  <a:lnTo>
-                    <a:pt x="1505339" y="2163758"/>
-                  </a:lnTo>
-                  <a:lnTo>
-                    <a:pt x="1505339" y="1889038"/>
-                  </a:lnTo>
-                  <a:lnTo>
-                    <a:pt x="1743024" y="1889038"/>
-                  </a:lnTo>
-                  <a:lnTo>
-                    <a:pt x="1743024" y="1612345"/>
-                  </a:lnTo>
-                  <a:lnTo>
-                    <a:pt x="1980709" y="1612345"/>
-                  </a:lnTo>
-                  <a:lnTo>
-                    <a:pt x="1980709" y="1342930"/>
-                  </a:lnTo>
-                  <a:lnTo>
-                    <a:pt x="2059938" y="1342930"/>
-                  </a:lnTo>
-                  <a:lnTo>
-                    <a:pt x="2059938" y="1080526"/>
-                  </a:lnTo>
-                  <a:lnTo>
-                    <a:pt x="2139166" y="1080526"/>
-                  </a:lnTo>
-                  <a:lnTo>
-                    <a:pt x="2139166" y="815192"/>
-                  </a:lnTo>
-                  <a:lnTo>
-                    <a:pt x="4119876" y="815192"/>
-                  </a:lnTo>
-                  <a:lnTo>
-                    <a:pt x="4119876" y="539843"/>
-                  </a:lnTo>
-                  <a:lnTo>
-                    <a:pt x="5942129" y="539843"/>
-                  </a:lnTo>
-                  <a:lnTo>
-                    <a:pt x="5942129" y="272151"/>
-                  </a:lnTo>
-                  <a:lnTo>
-                    <a:pt x="6179814" y="272151"/>
-                  </a:lnTo>
-                  <a:lnTo>
-                    <a:pt x="6179814" y="0"/>
-                  </a:lnTo>
-                  <a:lnTo>
-                    <a:pt x="6338271" y="0"/>
-                  </a:lnTo>
-                  <a:lnTo>
-                    <a:pt x="6338271" y="0"/>
-                  </a:lnTo>
-                  <a:lnTo>
-                    <a:pt x="6892870" y="0"/>
-                  </a:lnTo>
-                  <a:lnTo>
-                    <a:pt x="6892870" y="0"/>
+                    <a:pt x="696495" y="2196861"/>
+                  </a:lnTo>
+                  <a:lnTo>
+                    <a:pt x="696495" y="2196861"/>
+                  </a:lnTo>
+                  <a:lnTo>
+                    <a:pt x="928661" y="2196861"/>
+                  </a:lnTo>
+                  <a:lnTo>
+                    <a:pt x="928661" y="1950518"/>
+                  </a:lnTo>
+                  <a:lnTo>
+                    <a:pt x="1470380" y="1950518"/>
+                  </a:lnTo>
+                  <a:lnTo>
+                    <a:pt x="1470380" y="1702871"/>
+                  </a:lnTo>
+                  <a:lnTo>
+                    <a:pt x="1702545" y="1702871"/>
+                  </a:lnTo>
+                  <a:lnTo>
+                    <a:pt x="1702545" y="1453447"/>
+                  </a:lnTo>
+                  <a:lnTo>
+                    <a:pt x="1934710" y="1453447"/>
+                  </a:lnTo>
+                  <a:lnTo>
+                    <a:pt x="1934710" y="1210584"/>
+                  </a:lnTo>
+                  <a:lnTo>
+                    <a:pt x="2012099" y="1210584"/>
+                  </a:lnTo>
+                  <a:lnTo>
+                    <a:pt x="2012099" y="974039"/>
+                  </a:lnTo>
+                  <a:lnTo>
+                    <a:pt x="2089487" y="974039"/>
+                  </a:lnTo>
+                  <a:lnTo>
+                    <a:pt x="2089487" y="734854"/>
+                  </a:lnTo>
+                  <a:lnTo>
+                    <a:pt x="4024198" y="734854"/>
+                  </a:lnTo>
+                  <a:lnTo>
+                    <a:pt x="4024198" y="486641"/>
+                  </a:lnTo>
+                  <a:lnTo>
+                    <a:pt x="5804132" y="486641"/>
+                  </a:lnTo>
+                  <a:lnTo>
+                    <a:pt x="5804132" y="245330"/>
+                  </a:lnTo>
+                  <a:lnTo>
+                    <a:pt x="6036297" y="245330"/>
+                  </a:lnTo>
+                  <a:lnTo>
+                    <a:pt x="6036297" y="0"/>
+                  </a:lnTo>
+                  <a:lnTo>
+                    <a:pt x="6191074" y="0"/>
+                  </a:lnTo>
+                  <a:lnTo>
+                    <a:pt x="6191074" y="0"/>
+                  </a:lnTo>
+                  <a:lnTo>
+                    <a:pt x="6732793" y="0"/>
+                  </a:lnTo>
+                  <a:lnTo>
+                    <a:pt x="6732793" y="0"/>
                   </a:lnTo>
                 </a:path>
               </a:pathLst>
@@ -3220,8 +3220,8 @@
           </p:nvSpPr>
           <p:spPr>
             <a:xfrm>
-              <a:off x="692708" y="5540371"/>
-              <a:ext cx="279714" cy="80101"/>
+              <a:off x="756929" y="5433678"/>
+              <a:ext cx="355518" cy="101955"/>
             </a:xfrm>
             <a:prstGeom prst="rect">
               <a:avLst/>
@@ -3234,7 +3234,7 @@
             <a:p>
               <a:pPr algn="l" marL="0" marR="0" indent="0">
                 <a:lnSpc>
-                  <a:spcPts val="880"/>
+                  <a:spcPts val="1120"/>
                 </a:lnSpc>
                 <a:spcBef>
                   <a:spcPts val="0"/>
@@ -3244,7 +3244,7 @@
                 </a:spcAft>
               </a:pPr>
               <a:r>
-                <a:rPr sz="880">
+                <a:rPr sz="1120">
                   <a:solidFill>
                     <a:srgbClr val="4D4D4D">
                       <a:alpha val="100000"/>
@@ -3266,8 +3266,8 @@
           </p:nvSpPr>
           <p:spPr>
             <a:xfrm>
-              <a:off x="692708" y="4863249"/>
-              <a:ext cx="279714" cy="80101"/>
+              <a:off x="756929" y="4823286"/>
+              <a:ext cx="355518" cy="101955"/>
             </a:xfrm>
             <a:prstGeom prst="rect">
               <a:avLst/>
@@ -3280,7 +3280,7 @@
             <a:p>
               <a:pPr algn="l" marL="0" marR="0" indent="0">
                 <a:lnSpc>
-                  <a:spcPts val="880"/>
+                  <a:spcPts val="1120"/>
                 </a:lnSpc>
                 <a:spcBef>
                   <a:spcPts val="0"/>
@@ -3290,7 +3290,7 @@
                 </a:spcAft>
               </a:pPr>
               <a:r>
-                <a:rPr sz="880">
+                <a:rPr sz="1120">
                   <a:solidFill>
                     <a:srgbClr val="4D4D4D">
                       <a:alpha val="100000"/>
@@ -3312,8 +3312,8 @@
           </p:nvSpPr>
           <p:spPr>
             <a:xfrm>
-              <a:off x="692708" y="4186126"/>
-              <a:ext cx="279714" cy="80101"/>
+              <a:off x="756929" y="4212895"/>
+              <a:ext cx="355518" cy="101955"/>
             </a:xfrm>
             <a:prstGeom prst="rect">
               <a:avLst/>
@@ -3326,7 +3326,7 @@
             <a:p>
               <a:pPr algn="l" marL="0" marR="0" indent="0">
                 <a:lnSpc>
-                  <a:spcPts val="880"/>
+                  <a:spcPts val="1120"/>
                 </a:lnSpc>
                 <a:spcBef>
                   <a:spcPts val="0"/>
@@ -3336,7 +3336,7 @@
                 </a:spcAft>
               </a:pPr>
               <a:r>
-                <a:rPr sz="880">
+                <a:rPr sz="1120">
                   <a:solidFill>
                     <a:srgbClr val="4D4D4D">
                       <a:alpha val="100000"/>
@@ -3358,8 +3358,8 @@
           </p:nvSpPr>
           <p:spPr>
             <a:xfrm>
-              <a:off x="692708" y="3509004"/>
-              <a:ext cx="279714" cy="80101"/>
+              <a:off x="756929" y="3602503"/>
+              <a:ext cx="355518" cy="101955"/>
             </a:xfrm>
             <a:prstGeom prst="rect">
               <a:avLst/>
@@ -3372,7 +3372,7 @@
             <a:p>
               <a:pPr algn="l" marL="0" marR="0" indent="0">
                 <a:lnSpc>
-                  <a:spcPts val="880"/>
+                  <a:spcPts val="1120"/>
                 </a:lnSpc>
                 <a:spcBef>
                   <a:spcPts val="0"/>
@@ -3382,7 +3382,7 @@
                 </a:spcAft>
               </a:pPr>
               <a:r>
-                <a:rPr sz="880">
+                <a:rPr sz="1120">
                   <a:solidFill>
                     <a:srgbClr val="4D4D4D">
                       <a:alpha val="100000"/>
@@ -3404,8 +3404,8 @@
           </p:nvSpPr>
           <p:spPr>
             <a:xfrm>
-              <a:off x="692708" y="2831882"/>
-              <a:ext cx="279714" cy="80101"/>
+              <a:off x="756929" y="2992112"/>
+              <a:ext cx="355518" cy="101955"/>
             </a:xfrm>
             <a:prstGeom prst="rect">
               <a:avLst/>
@@ -3418,7 +3418,7 @@
             <a:p>
               <a:pPr algn="l" marL="0" marR="0" indent="0">
                 <a:lnSpc>
-                  <a:spcPts val="880"/>
+                  <a:spcPts val="1120"/>
                 </a:lnSpc>
                 <a:spcBef>
                   <a:spcPts val="0"/>
@@ -3428,7 +3428,7 @@
                 </a:spcAft>
               </a:pPr>
               <a:r>
-                <a:rPr sz="880">
+                <a:rPr sz="1120">
                   <a:solidFill>
                     <a:srgbClr val="4D4D4D">
                       <a:alpha val="100000"/>
@@ -3450,8 +3450,8 @@
           </p:nvSpPr>
           <p:spPr>
             <a:xfrm>
-              <a:off x="1110922" y="5785772"/>
-              <a:ext cx="62179" cy="80101"/>
+              <a:off x="1257131" y="5693022"/>
+              <a:ext cx="79004" cy="101955"/>
             </a:xfrm>
             <a:prstGeom prst="rect">
               <a:avLst/>
@@ -3464,7 +3464,7 @@
             <a:p>
               <a:pPr algn="l" marL="0" marR="0" indent="0">
                 <a:lnSpc>
-                  <a:spcPts val="880"/>
+                  <a:spcPts val="1120"/>
                 </a:lnSpc>
                 <a:spcBef>
                   <a:spcPts val="0"/>
@@ -3474,7 +3474,7 @@
                 </a:spcAft>
               </a:pPr>
               <a:r>
-                <a:rPr sz="880">
+                <a:rPr sz="1120">
                   <a:solidFill>
                     <a:srgbClr val="4D4D4D">
                       <a:alpha val="100000"/>
@@ -3496,8 +3496,8 @@
           </p:nvSpPr>
           <p:spPr>
             <a:xfrm>
-              <a:off x="3060542" y="5785772"/>
-              <a:ext cx="124358" cy="80101"/>
+              <a:off x="3152340" y="5693022"/>
+              <a:ext cx="158008" cy="101955"/>
             </a:xfrm>
             <a:prstGeom prst="rect">
               <a:avLst/>
@@ -3510,7 +3510,7 @@
             <a:p>
               <a:pPr algn="l" marL="0" marR="0" indent="0">
                 <a:lnSpc>
-                  <a:spcPts val="880"/>
+                  <a:spcPts val="1120"/>
                 </a:lnSpc>
                 <a:spcBef>
                   <a:spcPts val="0"/>
@@ -3520,7 +3520,7 @@
                 </a:spcAft>
               </a:pPr>
               <a:r>
-                <a:rPr sz="880">
+                <a:rPr sz="1120">
                   <a:solidFill>
                     <a:srgbClr val="4D4D4D">
                       <a:alpha val="100000"/>
@@ -3542,8 +3542,8 @@
           </p:nvSpPr>
           <p:spPr>
             <a:xfrm>
-              <a:off x="5041252" y="5785772"/>
-              <a:ext cx="124358" cy="80101"/>
+              <a:off x="5087051" y="5693022"/>
+              <a:ext cx="158008" cy="101955"/>
             </a:xfrm>
             <a:prstGeom prst="rect">
               <a:avLst/>
@@ -3556,7 +3556,7 @@
             <a:p>
               <a:pPr algn="l" marL="0" marR="0" indent="0">
                 <a:lnSpc>
-                  <a:spcPts val="880"/>
+                  <a:spcPts val="1120"/>
                 </a:lnSpc>
                 <a:spcBef>
                   <a:spcPts val="0"/>
@@ -3566,7 +3566,7 @@
                 </a:spcAft>
               </a:pPr>
               <a:r>
-                <a:rPr sz="880">
+                <a:rPr sz="1120">
                   <a:solidFill>
                     <a:srgbClr val="4D4D4D">
                       <a:alpha val="100000"/>
@@ -3588,8 +3588,8 @@
           </p:nvSpPr>
           <p:spPr>
             <a:xfrm>
-              <a:off x="7021962" y="5785772"/>
-              <a:ext cx="124358" cy="80101"/>
+              <a:off x="7021761" y="5693022"/>
+              <a:ext cx="158008" cy="101955"/>
             </a:xfrm>
             <a:prstGeom prst="rect">
               <a:avLst/>
@@ -3602,7 +3602,7 @@
             <a:p>
               <a:pPr algn="l" marL="0" marR="0" indent="0">
                 <a:lnSpc>
-                  <a:spcPts val="880"/>
+                  <a:spcPts val="1120"/>
                 </a:lnSpc>
                 <a:spcBef>
                   <a:spcPts val="0"/>
@@ -3612,7 +3612,7 @@
                 </a:spcAft>
               </a:pPr>
               <a:r>
-                <a:rPr sz="880">
+                <a:rPr sz="1120">
                   <a:solidFill>
                     <a:srgbClr val="4D4D4D">
                       <a:alpha val="100000"/>
@@ -3634,8 +3634,8 @@
           </p:nvSpPr>
           <p:spPr>
             <a:xfrm>
-              <a:off x="4228251" y="5925448"/>
-              <a:ext cx="1195760" cy="100218"/>
+              <a:off x="4134460" y="5870717"/>
+              <a:ext cx="1521470" cy="127558"/>
             </a:xfrm>
             <a:prstGeom prst="rect">
               <a:avLst/>
@@ -3648,7 +3648,7 @@
             <a:p>
               <a:pPr algn="l" marL="0" marR="0" indent="0">
                 <a:lnSpc>
-                  <a:spcPts val="1100"/>
+                  <a:spcPts val="1400"/>
                 </a:lnSpc>
                 <a:spcBef>
                   <a:spcPts val="0"/>
@@ -3658,7 +3658,7 @@
                 </a:spcAft>
               </a:pPr>
               <a:r>
-                <a:rPr sz="1100">
+                <a:rPr sz="1400">
                   <a:solidFill>
                     <a:srgbClr val="000000">
                       <a:alpha val="100000"/>
@@ -3680,8 +3680,8 @@
           </p:nvSpPr>
           <p:spPr>
             <a:xfrm rot="-5400000">
-              <a:off x="-300468" y="4103109"/>
-              <a:ext cx="1754733" cy="100218"/>
+              <a:off x="-506889" y="4134324"/>
+              <a:ext cx="2232873" cy="127558"/>
             </a:xfrm>
             <a:prstGeom prst="rect">
               <a:avLst/>
@@ -3694,7 +3694,7 @@
             <a:p>
               <a:pPr algn="l" marL="0" marR="0" indent="0">
                 <a:lnSpc>
-                  <a:spcPts val="1100"/>
+                  <a:spcPts val="1400"/>
                 </a:lnSpc>
                 <a:spcBef>
                   <a:spcPts val="0"/>
@@ -3704,7 +3704,7 @@
                 </a:spcAft>
               </a:pPr>
               <a:r>
-                <a:rPr sz="1100">
+                <a:rPr sz="1400">
                   <a:solidFill>
                     <a:srgbClr val="000000">
                       <a:alpha val="100000"/>
@@ -3726,7 +3726,7 @@
           </p:nvSpPr>
           <p:spPr>
             <a:xfrm>
-              <a:off x="3609655" y="2264798"/>
+              <a:off x="3402128" y="2407465"/>
               <a:ext cx="175564" cy="0"/>
             </a:xfrm>
             <a:custGeom>
@@ -3766,7 +3766,7 @@
           </p:nvSpPr>
           <p:spPr>
             <a:xfrm>
-              <a:off x="4850228" y="2264798"/>
+              <a:off x="4919957" y="2407465"/>
               <a:ext cx="175564" cy="0"/>
             </a:xfrm>
             <a:custGeom>
@@ -3806,8 +3806,8 @@
           </p:nvSpPr>
           <p:spPr>
             <a:xfrm>
-              <a:off x="3876754" y="2224748"/>
-              <a:ext cx="881938" cy="80101"/>
+              <a:off x="3688206" y="2356487"/>
+              <a:ext cx="1121237" cy="101955"/>
             </a:xfrm>
             <a:prstGeom prst="rect">
               <a:avLst/>
@@ -3820,7 +3820,7 @@
             <a:p>
               <a:pPr algn="l" marL="0" marR="0" indent="0">
                 <a:lnSpc>
-                  <a:spcPts val="880"/>
+                  <a:spcPts val="1120"/>
                 </a:lnSpc>
                 <a:spcBef>
                   <a:spcPts val="0"/>
@@ -3830,7 +3830,7 @@
                 </a:spcAft>
               </a:pPr>
               <a:r>
-                <a:rPr sz="880">
+                <a:rPr sz="1120">
                   <a:solidFill>
                     <a:srgbClr val="000000">
                       <a:alpha val="100000"/>
@@ -3852,8 +3852,8 @@
           </p:nvSpPr>
           <p:spPr>
             <a:xfrm>
-              <a:off x="5117327" y="2224748"/>
-              <a:ext cx="947226" cy="80101"/>
+              <a:off x="5206035" y="2356487"/>
+              <a:ext cx="1204173" cy="101955"/>
             </a:xfrm>
             <a:prstGeom prst="rect">
               <a:avLst/>
@@ -3866,7 +3866,7 @@
             <a:p>
               <a:pPr algn="l" marL="0" marR="0" indent="0">
                 <a:lnSpc>
-                  <a:spcPts val="880"/>
+                  <a:spcPts val="1120"/>
                 </a:lnSpc>
                 <a:spcBef>
                   <a:spcPts val="0"/>
@@ -3876,7 +3876,7 @@
                 </a:spcAft>
               </a:pPr>
               <a:r>
-                <a:rPr sz="880">
+                <a:rPr sz="1120">
                   <a:solidFill>
                     <a:srgbClr val="000000">
                       <a:alpha val="100000"/>
@@ -3898,8 +3898,8 @@
           </p:nvSpPr>
           <p:spPr>
             <a:xfrm>
-              <a:off x="1035053" y="1896563"/>
-              <a:ext cx="4337273" cy="91165"/>
+              <a:off x="1192159" y="1977589"/>
+              <a:ext cx="5205404" cy="109362"/>
             </a:xfrm>
             <a:prstGeom prst="rect">
               <a:avLst/>
@@ -3912,7 +3912,7 @@
             <a:p>
               <a:pPr algn="l" marL="0" marR="0" indent="0">
                 <a:lnSpc>
-                  <a:spcPts val="1000"/>
+                  <a:spcPts val="1200"/>
                 </a:lnSpc>
                 <a:spcBef>
                   <a:spcPts val="0"/>
@@ -3922,7 +3922,7 @@
                 </a:spcAft>
               </a:pPr>
               <a:r>
-                <a:rPr sz="1000">
+                <a:rPr sz="1200">
                   <a:solidFill>
                     <a:srgbClr val="404040">
                       <a:alpha val="100000"/>
@@ -3944,8 +3944,8 @@
           </p:nvSpPr>
           <p:spPr>
             <a:xfrm>
-              <a:off x="1035053" y="1669789"/>
-              <a:ext cx="1033637" cy="120152"/>
+              <a:off x="1192159" y="1688767"/>
+              <a:ext cx="1315913" cy="153070"/>
             </a:xfrm>
             <a:prstGeom prst="rect">
               <a:avLst/>
@@ -3958,7 +3958,7 @@
             <a:p>
               <a:pPr algn="l" marL="0" marR="0" indent="0">
                 <a:lnSpc>
-                  <a:spcPts val="1320"/>
+                  <a:spcPts val="1680"/>
                 </a:lnSpc>
                 <a:spcBef>
                   <a:spcPts val="0"/>
@@ -3968,7 +3968,7 @@
                 </a:spcAft>
               </a:pPr>
               <a:r>
-                <a:rPr sz="1320">
+                <a:rPr sz="1680">
                   <a:solidFill>
                     <a:srgbClr val="000000">
                       <a:alpha val="100000"/>
